--- a/AI14-Install-LLM.pptx
+++ b/AI14-Install-LLM.pptx
@@ -5,10 +5,10 @@
     <p:sldMasterId id="2147483653" r:id="rId1"/>
   </p:sldMasterIdLst>
   <p:notesMasterIdLst>
-    <p:notesMasterId r:id="rId32"/>
+    <p:notesMasterId r:id="rId35"/>
   </p:notesMasterIdLst>
   <p:handoutMasterIdLst>
-    <p:handoutMasterId r:id="rId33"/>
+    <p:handoutMasterId r:id="rId36"/>
   </p:handoutMasterIdLst>
   <p:sldIdLst>
     <p:sldId id="264" r:id="rId2"/>
@@ -41,6 +41,9 @@
     <p:sldId id="391" r:id="rId29"/>
     <p:sldId id="393" r:id="rId30"/>
     <p:sldId id="397" r:id="rId31"/>
+    <p:sldId id="398" r:id="rId32"/>
+    <p:sldId id="399" r:id="rId33"/>
+    <p:sldId id="400" r:id="rId34"/>
   </p:sldIdLst>
   <p:sldSz cx="9144000" cy="6858000" type="screen4x3"/>
   <p:notesSz cx="6648450" cy="9782175"/>
@@ -2409,6 +2412,753 @@
   <dgm:styleLbl name="fgShp">
     <dgm:fillClrLst meth="repeat">
       <a:schemeClr val="accent1">
+        <a:tint val="60000"/>
+      </a:schemeClr>
+    </dgm:fillClrLst>
+    <dgm:linClrLst meth="repeat">
+      <a:schemeClr val="lt1"/>
+    </dgm:linClrLst>
+    <dgm:effectClrLst/>
+    <dgm:txLinClrLst/>
+    <dgm:txFillClrLst meth="repeat">
+      <a:schemeClr val="dk1"/>
+    </dgm:txFillClrLst>
+    <dgm:txEffectClrLst/>
+  </dgm:styleLbl>
+  <dgm:styleLbl name="revTx">
+    <dgm:fillClrLst meth="repeat">
+      <a:schemeClr val="lt1">
+        <a:alpha val="0"/>
+      </a:schemeClr>
+    </dgm:fillClrLst>
+    <dgm:linClrLst meth="repeat">
+      <a:schemeClr val="dk1">
+        <a:alpha val="0"/>
+      </a:schemeClr>
+    </dgm:linClrLst>
+    <dgm:effectClrLst/>
+    <dgm:txLinClrLst/>
+    <dgm:txFillClrLst meth="repeat">
+      <a:schemeClr val="tx1"/>
+    </dgm:txFillClrLst>
+    <dgm:txEffectClrLst/>
+  </dgm:styleLbl>
+</dgm:colorsDef>
+</file>
+
+<file path=ppt/diagrams/colors4.xml><?xml version="1.0" encoding="utf-8"?>
+<dgm:colorsDef xmlns:dgm="http://schemas.openxmlformats.org/drawingml/2006/diagram" xmlns:a="http://schemas.openxmlformats.org/drawingml/2006/main" uniqueId="urn:microsoft.com/office/officeart/2005/8/colors/accent2_2">
+  <dgm:title val=""/>
+  <dgm:desc val=""/>
+  <dgm:catLst>
+    <dgm:cat type="accent2" pri="11200"/>
+  </dgm:catLst>
+  <dgm:styleLbl name="node0">
+    <dgm:fillClrLst meth="repeat">
+      <a:schemeClr val="accent2"/>
+    </dgm:fillClrLst>
+    <dgm:linClrLst meth="repeat">
+      <a:schemeClr val="lt1"/>
+    </dgm:linClrLst>
+    <dgm:effectClrLst/>
+    <dgm:txLinClrLst/>
+    <dgm:txFillClrLst/>
+    <dgm:txEffectClrLst/>
+  </dgm:styleLbl>
+  <dgm:styleLbl name="node1">
+    <dgm:fillClrLst meth="repeat">
+      <a:schemeClr val="accent2"/>
+    </dgm:fillClrLst>
+    <dgm:linClrLst meth="repeat">
+      <a:schemeClr val="lt1"/>
+    </dgm:linClrLst>
+    <dgm:effectClrLst/>
+    <dgm:txLinClrLst/>
+    <dgm:txFillClrLst/>
+    <dgm:txEffectClrLst/>
+  </dgm:styleLbl>
+  <dgm:styleLbl name="alignNode1">
+    <dgm:fillClrLst meth="repeat">
+      <a:schemeClr val="accent2"/>
+    </dgm:fillClrLst>
+    <dgm:linClrLst meth="repeat">
+      <a:schemeClr val="accent2"/>
+    </dgm:linClrLst>
+    <dgm:effectClrLst/>
+    <dgm:txLinClrLst/>
+    <dgm:txFillClrLst/>
+    <dgm:txEffectClrLst/>
+  </dgm:styleLbl>
+  <dgm:styleLbl name="lnNode1">
+    <dgm:fillClrLst meth="repeat">
+      <a:schemeClr val="accent2"/>
+    </dgm:fillClrLst>
+    <dgm:linClrLst meth="repeat">
+      <a:schemeClr val="lt1"/>
+    </dgm:linClrLst>
+    <dgm:effectClrLst/>
+    <dgm:txLinClrLst/>
+    <dgm:txFillClrLst/>
+    <dgm:txEffectClrLst/>
+  </dgm:styleLbl>
+  <dgm:styleLbl name="vennNode1">
+    <dgm:fillClrLst meth="repeat">
+      <a:schemeClr val="accent2">
+        <a:alpha val="50000"/>
+      </a:schemeClr>
+    </dgm:fillClrLst>
+    <dgm:linClrLst meth="repeat">
+      <a:schemeClr val="lt1"/>
+    </dgm:linClrLst>
+    <dgm:effectClrLst/>
+    <dgm:txLinClrLst/>
+    <dgm:txFillClrLst/>
+    <dgm:txEffectClrLst/>
+  </dgm:styleLbl>
+  <dgm:styleLbl name="node2">
+    <dgm:fillClrLst meth="repeat">
+      <a:schemeClr val="accent2"/>
+    </dgm:fillClrLst>
+    <dgm:linClrLst meth="repeat">
+      <a:schemeClr val="lt1"/>
+    </dgm:linClrLst>
+    <dgm:effectClrLst/>
+    <dgm:txLinClrLst/>
+    <dgm:txFillClrLst/>
+    <dgm:txEffectClrLst/>
+  </dgm:styleLbl>
+  <dgm:styleLbl name="node3">
+    <dgm:fillClrLst meth="repeat">
+      <a:schemeClr val="accent2"/>
+    </dgm:fillClrLst>
+    <dgm:linClrLst meth="repeat">
+      <a:schemeClr val="lt1"/>
+    </dgm:linClrLst>
+    <dgm:effectClrLst/>
+    <dgm:txLinClrLst/>
+    <dgm:txFillClrLst/>
+    <dgm:txEffectClrLst/>
+  </dgm:styleLbl>
+  <dgm:styleLbl name="node4">
+    <dgm:fillClrLst meth="repeat">
+      <a:schemeClr val="accent2"/>
+    </dgm:fillClrLst>
+    <dgm:linClrLst meth="repeat">
+      <a:schemeClr val="lt1"/>
+    </dgm:linClrLst>
+    <dgm:effectClrLst/>
+    <dgm:txLinClrLst/>
+    <dgm:txFillClrLst/>
+    <dgm:txEffectClrLst/>
+  </dgm:styleLbl>
+  <dgm:styleLbl name="fgImgPlace1">
+    <dgm:fillClrLst meth="repeat">
+      <a:schemeClr val="accent2">
+        <a:tint val="50000"/>
+      </a:schemeClr>
+    </dgm:fillClrLst>
+    <dgm:linClrLst meth="repeat">
+      <a:schemeClr val="lt1"/>
+    </dgm:linClrLst>
+    <dgm:effectClrLst/>
+    <dgm:txLinClrLst/>
+    <dgm:txFillClrLst meth="repeat">
+      <a:schemeClr val="lt1"/>
+    </dgm:txFillClrLst>
+    <dgm:txEffectClrLst/>
+  </dgm:styleLbl>
+  <dgm:styleLbl name="alignImgPlace1">
+    <dgm:fillClrLst meth="repeat">
+      <a:schemeClr val="accent2">
+        <a:tint val="50000"/>
+      </a:schemeClr>
+    </dgm:fillClrLst>
+    <dgm:linClrLst meth="repeat">
+      <a:schemeClr val="lt1"/>
+    </dgm:linClrLst>
+    <dgm:effectClrLst/>
+    <dgm:txLinClrLst/>
+    <dgm:txFillClrLst meth="repeat">
+      <a:schemeClr val="lt1"/>
+    </dgm:txFillClrLst>
+    <dgm:txEffectClrLst/>
+  </dgm:styleLbl>
+  <dgm:styleLbl name="bgImgPlace1">
+    <dgm:fillClrLst meth="repeat">
+      <a:schemeClr val="accent2">
+        <a:tint val="50000"/>
+      </a:schemeClr>
+    </dgm:fillClrLst>
+    <dgm:linClrLst meth="repeat">
+      <a:schemeClr val="lt1"/>
+    </dgm:linClrLst>
+    <dgm:effectClrLst/>
+    <dgm:txLinClrLst/>
+    <dgm:txFillClrLst meth="repeat">
+      <a:schemeClr val="lt1"/>
+    </dgm:txFillClrLst>
+    <dgm:txEffectClrLst/>
+  </dgm:styleLbl>
+  <dgm:styleLbl name="sibTrans2D1">
+    <dgm:fillClrLst meth="repeat">
+      <a:schemeClr val="accent2">
+        <a:tint val="60000"/>
+      </a:schemeClr>
+    </dgm:fillClrLst>
+    <dgm:linClrLst meth="repeat">
+      <a:schemeClr val="accent2">
+        <a:tint val="60000"/>
+      </a:schemeClr>
+    </dgm:linClrLst>
+    <dgm:effectClrLst/>
+    <dgm:txLinClrLst/>
+    <dgm:txFillClrLst/>
+    <dgm:txEffectClrLst/>
+  </dgm:styleLbl>
+  <dgm:styleLbl name="fgSibTrans2D1">
+    <dgm:fillClrLst meth="repeat">
+      <a:schemeClr val="accent2">
+        <a:tint val="60000"/>
+      </a:schemeClr>
+    </dgm:fillClrLst>
+    <dgm:linClrLst meth="repeat">
+      <a:schemeClr val="accent2">
+        <a:tint val="60000"/>
+      </a:schemeClr>
+    </dgm:linClrLst>
+    <dgm:effectClrLst/>
+    <dgm:txLinClrLst/>
+    <dgm:txFillClrLst/>
+    <dgm:txEffectClrLst/>
+  </dgm:styleLbl>
+  <dgm:styleLbl name="bgSibTrans2D1">
+    <dgm:fillClrLst meth="repeat">
+      <a:schemeClr val="accent2">
+        <a:tint val="60000"/>
+      </a:schemeClr>
+    </dgm:fillClrLst>
+    <dgm:linClrLst meth="repeat">
+      <a:schemeClr val="accent2">
+        <a:tint val="60000"/>
+      </a:schemeClr>
+    </dgm:linClrLst>
+    <dgm:effectClrLst/>
+    <dgm:txLinClrLst/>
+    <dgm:txFillClrLst/>
+    <dgm:txEffectClrLst/>
+  </dgm:styleLbl>
+  <dgm:styleLbl name="sibTrans1D1">
+    <dgm:fillClrLst meth="repeat">
+      <a:schemeClr val="accent2"/>
+    </dgm:fillClrLst>
+    <dgm:linClrLst meth="repeat">
+      <a:schemeClr val="accent2"/>
+    </dgm:linClrLst>
+    <dgm:effectClrLst/>
+    <dgm:txLinClrLst/>
+    <dgm:txFillClrLst meth="repeat">
+      <a:schemeClr val="tx1"/>
+    </dgm:txFillClrLst>
+    <dgm:txEffectClrLst/>
+  </dgm:styleLbl>
+  <dgm:styleLbl name="callout">
+    <dgm:fillClrLst meth="repeat">
+      <a:schemeClr val="accent2"/>
+    </dgm:fillClrLst>
+    <dgm:linClrLst meth="repeat">
+      <a:schemeClr val="accent2">
+        <a:tint val="50000"/>
+      </a:schemeClr>
+    </dgm:linClrLst>
+    <dgm:effectClrLst/>
+    <dgm:txLinClrLst/>
+    <dgm:txFillClrLst meth="repeat">
+      <a:schemeClr val="tx1"/>
+    </dgm:txFillClrLst>
+    <dgm:txEffectClrLst/>
+  </dgm:styleLbl>
+  <dgm:styleLbl name="asst0">
+    <dgm:fillClrLst meth="repeat">
+      <a:schemeClr val="accent2"/>
+    </dgm:fillClrLst>
+    <dgm:linClrLst meth="repeat">
+      <a:schemeClr val="lt1"/>
+    </dgm:linClrLst>
+    <dgm:effectClrLst/>
+    <dgm:txLinClrLst/>
+    <dgm:txFillClrLst/>
+    <dgm:txEffectClrLst/>
+  </dgm:styleLbl>
+  <dgm:styleLbl name="asst1">
+    <dgm:fillClrLst meth="repeat">
+      <a:schemeClr val="accent2"/>
+    </dgm:fillClrLst>
+    <dgm:linClrLst meth="repeat">
+      <a:schemeClr val="lt1"/>
+    </dgm:linClrLst>
+    <dgm:effectClrLst/>
+    <dgm:txLinClrLst/>
+    <dgm:txFillClrLst/>
+    <dgm:txEffectClrLst/>
+  </dgm:styleLbl>
+  <dgm:styleLbl name="asst2">
+    <dgm:fillClrLst meth="repeat">
+      <a:schemeClr val="accent2"/>
+    </dgm:fillClrLst>
+    <dgm:linClrLst meth="repeat">
+      <a:schemeClr val="lt1"/>
+    </dgm:linClrLst>
+    <dgm:effectClrLst/>
+    <dgm:txLinClrLst/>
+    <dgm:txFillClrLst/>
+    <dgm:txEffectClrLst/>
+  </dgm:styleLbl>
+  <dgm:styleLbl name="asst3">
+    <dgm:fillClrLst meth="repeat">
+      <a:schemeClr val="accent2"/>
+    </dgm:fillClrLst>
+    <dgm:linClrLst meth="repeat">
+      <a:schemeClr val="lt1"/>
+    </dgm:linClrLst>
+    <dgm:effectClrLst/>
+    <dgm:txLinClrLst/>
+    <dgm:txFillClrLst/>
+    <dgm:txEffectClrLst/>
+  </dgm:styleLbl>
+  <dgm:styleLbl name="asst4">
+    <dgm:fillClrLst meth="repeat">
+      <a:schemeClr val="accent2"/>
+    </dgm:fillClrLst>
+    <dgm:linClrLst meth="repeat">
+      <a:schemeClr val="lt1"/>
+    </dgm:linClrLst>
+    <dgm:effectClrLst/>
+    <dgm:txLinClrLst/>
+    <dgm:txFillClrLst/>
+    <dgm:txEffectClrLst/>
+  </dgm:styleLbl>
+  <dgm:styleLbl name="parChTrans2D1">
+    <dgm:fillClrLst meth="repeat">
+      <a:schemeClr val="accent2">
+        <a:tint val="60000"/>
+      </a:schemeClr>
+    </dgm:fillClrLst>
+    <dgm:linClrLst meth="repeat">
+      <a:schemeClr val="accent2">
+        <a:tint val="60000"/>
+      </a:schemeClr>
+    </dgm:linClrLst>
+    <dgm:effectClrLst/>
+    <dgm:txLinClrLst/>
+    <dgm:txFillClrLst meth="repeat">
+      <a:schemeClr val="lt1"/>
+    </dgm:txFillClrLst>
+    <dgm:txEffectClrLst/>
+  </dgm:styleLbl>
+  <dgm:styleLbl name="parChTrans2D2">
+    <dgm:fillClrLst meth="repeat">
+      <a:schemeClr val="accent2"/>
+    </dgm:fillClrLst>
+    <dgm:linClrLst meth="repeat">
+      <a:schemeClr val="accent2"/>
+    </dgm:linClrLst>
+    <dgm:effectClrLst/>
+    <dgm:txLinClrLst/>
+    <dgm:txFillClrLst meth="repeat">
+      <a:schemeClr val="lt1"/>
+    </dgm:txFillClrLst>
+    <dgm:txEffectClrLst/>
+  </dgm:styleLbl>
+  <dgm:styleLbl name="parChTrans2D3">
+    <dgm:fillClrLst meth="repeat">
+      <a:schemeClr val="accent2"/>
+    </dgm:fillClrLst>
+    <dgm:linClrLst meth="repeat">
+      <a:schemeClr val="accent2"/>
+    </dgm:linClrLst>
+    <dgm:effectClrLst/>
+    <dgm:txLinClrLst/>
+    <dgm:txFillClrLst meth="repeat">
+      <a:schemeClr val="lt1"/>
+    </dgm:txFillClrLst>
+    <dgm:txEffectClrLst/>
+  </dgm:styleLbl>
+  <dgm:styleLbl name="parChTrans2D4">
+    <dgm:fillClrLst meth="repeat">
+      <a:schemeClr val="accent2"/>
+    </dgm:fillClrLst>
+    <dgm:linClrLst meth="repeat">
+      <a:schemeClr val="accent2"/>
+    </dgm:linClrLst>
+    <dgm:effectClrLst/>
+    <dgm:txLinClrLst/>
+    <dgm:txFillClrLst meth="repeat">
+      <a:schemeClr val="lt1"/>
+    </dgm:txFillClrLst>
+    <dgm:txEffectClrLst/>
+  </dgm:styleLbl>
+  <dgm:styleLbl name="parChTrans1D1">
+    <dgm:fillClrLst meth="repeat">
+      <a:schemeClr val="accent2"/>
+    </dgm:fillClrLst>
+    <dgm:linClrLst meth="repeat">
+      <a:schemeClr val="accent2">
+        <a:shade val="60000"/>
+      </a:schemeClr>
+    </dgm:linClrLst>
+    <dgm:effectClrLst/>
+    <dgm:txLinClrLst/>
+    <dgm:txFillClrLst meth="repeat">
+      <a:schemeClr val="tx1"/>
+    </dgm:txFillClrLst>
+    <dgm:txEffectClrLst/>
+  </dgm:styleLbl>
+  <dgm:styleLbl name="parChTrans1D2">
+    <dgm:fillClrLst meth="repeat">
+      <a:schemeClr val="accent2"/>
+    </dgm:fillClrLst>
+    <dgm:linClrLst meth="repeat">
+      <a:schemeClr val="accent2">
+        <a:shade val="60000"/>
+      </a:schemeClr>
+    </dgm:linClrLst>
+    <dgm:effectClrLst/>
+    <dgm:txLinClrLst/>
+    <dgm:txFillClrLst meth="repeat">
+      <a:schemeClr val="tx1"/>
+    </dgm:txFillClrLst>
+    <dgm:txEffectClrLst/>
+  </dgm:styleLbl>
+  <dgm:styleLbl name="parChTrans1D3">
+    <dgm:fillClrLst meth="repeat">
+      <a:schemeClr val="accent2"/>
+    </dgm:fillClrLst>
+    <dgm:linClrLst meth="repeat">
+      <a:schemeClr val="accent2">
+        <a:shade val="80000"/>
+      </a:schemeClr>
+    </dgm:linClrLst>
+    <dgm:effectClrLst/>
+    <dgm:txLinClrLst/>
+    <dgm:txFillClrLst meth="repeat">
+      <a:schemeClr val="tx1"/>
+    </dgm:txFillClrLst>
+    <dgm:txEffectClrLst/>
+  </dgm:styleLbl>
+  <dgm:styleLbl name="parChTrans1D4">
+    <dgm:fillClrLst meth="repeat">
+      <a:schemeClr val="accent2"/>
+    </dgm:fillClrLst>
+    <dgm:linClrLst meth="repeat">
+      <a:schemeClr val="accent2">
+        <a:shade val="80000"/>
+      </a:schemeClr>
+    </dgm:linClrLst>
+    <dgm:effectClrLst/>
+    <dgm:txLinClrLst/>
+    <dgm:txFillClrLst meth="repeat">
+      <a:schemeClr val="tx1"/>
+    </dgm:txFillClrLst>
+    <dgm:txEffectClrLst/>
+  </dgm:styleLbl>
+  <dgm:styleLbl name="fgAcc1">
+    <dgm:fillClrLst meth="repeat">
+      <a:schemeClr val="lt1">
+        <a:alpha val="90000"/>
+      </a:schemeClr>
+    </dgm:fillClrLst>
+    <dgm:linClrLst meth="repeat">
+      <a:schemeClr val="accent2"/>
+    </dgm:linClrLst>
+    <dgm:effectClrLst/>
+    <dgm:txLinClrLst/>
+    <dgm:txFillClrLst meth="repeat">
+      <a:schemeClr val="dk1"/>
+    </dgm:txFillClrLst>
+    <dgm:txEffectClrLst/>
+  </dgm:styleLbl>
+  <dgm:styleLbl name="conFgAcc1">
+    <dgm:fillClrLst meth="repeat">
+      <a:schemeClr val="lt1">
+        <a:alpha val="90000"/>
+      </a:schemeClr>
+    </dgm:fillClrLst>
+    <dgm:linClrLst meth="repeat">
+      <a:schemeClr val="accent2"/>
+    </dgm:linClrLst>
+    <dgm:effectClrLst/>
+    <dgm:txLinClrLst/>
+    <dgm:txFillClrLst meth="repeat">
+      <a:schemeClr val="dk1"/>
+    </dgm:txFillClrLst>
+    <dgm:txEffectClrLst/>
+  </dgm:styleLbl>
+  <dgm:styleLbl name="alignAcc1">
+    <dgm:fillClrLst meth="repeat">
+      <a:schemeClr val="lt1">
+        <a:alpha val="90000"/>
+      </a:schemeClr>
+    </dgm:fillClrLst>
+    <dgm:linClrLst meth="repeat">
+      <a:schemeClr val="accent2"/>
+    </dgm:linClrLst>
+    <dgm:effectClrLst/>
+    <dgm:txLinClrLst/>
+    <dgm:txFillClrLst meth="repeat">
+      <a:schemeClr val="dk1"/>
+    </dgm:txFillClrLst>
+    <dgm:txEffectClrLst/>
+  </dgm:styleLbl>
+  <dgm:styleLbl name="trAlignAcc1">
+    <dgm:fillClrLst meth="repeat">
+      <a:schemeClr val="lt1">
+        <a:alpha val="40000"/>
+      </a:schemeClr>
+    </dgm:fillClrLst>
+    <dgm:linClrLst meth="repeat">
+      <a:schemeClr val="accent2"/>
+    </dgm:linClrLst>
+    <dgm:effectClrLst/>
+    <dgm:txLinClrLst/>
+    <dgm:txFillClrLst meth="repeat">
+      <a:schemeClr val="dk1"/>
+    </dgm:txFillClrLst>
+    <dgm:txEffectClrLst/>
+  </dgm:styleLbl>
+  <dgm:styleLbl name="bgAcc1">
+    <dgm:fillClrLst meth="repeat">
+      <a:schemeClr val="lt1">
+        <a:alpha val="90000"/>
+      </a:schemeClr>
+    </dgm:fillClrLst>
+    <dgm:linClrLst meth="repeat">
+      <a:schemeClr val="accent2"/>
+    </dgm:linClrLst>
+    <dgm:effectClrLst/>
+    <dgm:txLinClrLst/>
+    <dgm:txFillClrLst meth="repeat">
+      <a:schemeClr val="dk1"/>
+    </dgm:txFillClrLst>
+    <dgm:txEffectClrLst/>
+  </dgm:styleLbl>
+  <dgm:styleLbl name="solidFgAcc1">
+    <dgm:fillClrLst meth="repeat">
+      <a:schemeClr val="lt1"/>
+    </dgm:fillClrLst>
+    <dgm:linClrLst meth="repeat">
+      <a:schemeClr val="accent2"/>
+    </dgm:linClrLst>
+    <dgm:effectClrLst/>
+    <dgm:txLinClrLst/>
+    <dgm:txFillClrLst meth="repeat">
+      <a:schemeClr val="dk1"/>
+    </dgm:txFillClrLst>
+    <dgm:txEffectClrLst/>
+  </dgm:styleLbl>
+  <dgm:styleLbl name="solidAlignAcc1">
+    <dgm:fillClrLst meth="repeat">
+      <a:schemeClr val="lt1"/>
+    </dgm:fillClrLst>
+    <dgm:linClrLst meth="repeat">
+      <a:schemeClr val="accent2"/>
+    </dgm:linClrLst>
+    <dgm:effectClrLst/>
+    <dgm:txLinClrLst/>
+    <dgm:txFillClrLst meth="repeat">
+      <a:schemeClr val="dk1"/>
+    </dgm:txFillClrLst>
+    <dgm:txEffectClrLst/>
+  </dgm:styleLbl>
+  <dgm:styleLbl name="solidBgAcc1">
+    <dgm:fillClrLst meth="repeat">
+      <a:schemeClr val="lt1"/>
+    </dgm:fillClrLst>
+    <dgm:linClrLst meth="repeat">
+      <a:schemeClr val="accent2"/>
+    </dgm:linClrLst>
+    <dgm:effectClrLst/>
+    <dgm:txLinClrLst/>
+    <dgm:txFillClrLst meth="repeat">
+      <a:schemeClr val="dk1"/>
+    </dgm:txFillClrLst>
+    <dgm:txEffectClrLst/>
+  </dgm:styleLbl>
+  <dgm:styleLbl name="fgAccFollowNode1">
+    <dgm:fillClrLst meth="repeat">
+      <a:schemeClr val="accent2">
+        <a:alpha val="90000"/>
+        <a:tint val="40000"/>
+      </a:schemeClr>
+    </dgm:fillClrLst>
+    <dgm:linClrLst meth="repeat">
+      <a:schemeClr val="accent2">
+        <a:alpha val="90000"/>
+        <a:tint val="40000"/>
+      </a:schemeClr>
+    </dgm:linClrLst>
+    <dgm:effectClrLst/>
+    <dgm:txLinClrLst/>
+    <dgm:txFillClrLst meth="repeat">
+      <a:schemeClr val="dk1"/>
+    </dgm:txFillClrLst>
+    <dgm:txEffectClrLst/>
+  </dgm:styleLbl>
+  <dgm:styleLbl name="alignAccFollowNode1">
+    <dgm:fillClrLst meth="repeat">
+      <a:schemeClr val="accent2">
+        <a:alpha val="90000"/>
+        <a:tint val="40000"/>
+      </a:schemeClr>
+    </dgm:fillClrLst>
+    <dgm:linClrLst meth="repeat">
+      <a:schemeClr val="accent2">
+        <a:alpha val="90000"/>
+        <a:tint val="40000"/>
+      </a:schemeClr>
+    </dgm:linClrLst>
+    <dgm:effectClrLst/>
+    <dgm:txLinClrLst/>
+    <dgm:txFillClrLst meth="repeat">
+      <a:schemeClr val="dk1"/>
+    </dgm:txFillClrLst>
+    <dgm:txEffectClrLst/>
+  </dgm:styleLbl>
+  <dgm:styleLbl name="bgAccFollowNode1">
+    <dgm:fillClrLst meth="repeat">
+      <a:schemeClr val="accent2">
+        <a:alpha val="90000"/>
+        <a:tint val="40000"/>
+      </a:schemeClr>
+    </dgm:fillClrLst>
+    <dgm:linClrLst meth="repeat">
+      <a:schemeClr val="accent2">
+        <a:alpha val="90000"/>
+        <a:tint val="40000"/>
+      </a:schemeClr>
+    </dgm:linClrLst>
+    <dgm:effectClrLst/>
+    <dgm:txLinClrLst/>
+    <dgm:txFillClrLst meth="repeat">
+      <a:schemeClr val="dk1"/>
+    </dgm:txFillClrLst>
+    <dgm:txEffectClrLst/>
+  </dgm:styleLbl>
+  <dgm:styleLbl name="fgAcc0">
+    <dgm:fillClrLst meth="repeat">
+      <a:schemeClr val="lt1">
+        <a:alpha val="90000"/>
+      </a:schemeClr>
+    </dgm:fillClrLst>
+    <dgm:linClrLst meth="repeat">
+      <a:schemeClr val="accent2"/>
+    </dgm:linClrLst>
+    <dgm:effectClrLst/>
+    <dgm:txLinClrLst/>
+    <dgm:txFillClrLst meth="repeat">
+      <a:schemeClr val="dk1"/>
+    </dgm:txFillClrLst>
+    <dgm:txEffectClrLst/>
+  </dgm:styleLbl>
+  <dgm:styleLbl name="fgAcc2">
+    <dgm:fillClrLst meth="repeat">
+      <a:schemeClr val="lt1">
+        <a:alpha val="90000"/>
+      </a:schemeClr>
+    </dgm:fillClrLst>
+    <dgm:linClrLst meth="repeat">
+      <a:schemeClr val="accent2"/>
+    </dgm:linClrLst>
+    <dgm:effectClrLst/>
+    <dgm:txLinClrLst/>
+    <dgm:txFillClrLst meth="repeat">
+      <a:schemeClr val="dk1"/>
+    </dgm:txFillClrLst>
+    <dgm:txEffectClrLst/>
+  </dgm:styleLbl>
+  <dgm:styleLbl name="fgAcc3">
+    <dgm:fillClrLst meth="repeat">
+      <a:schemeClr val="lt1">
+        <a:alpha val="90000"/>
+      </a:schemeClr>
+    </dgm:fillClrLst>
+    <dgm:linClrLst meth="repeat">
+      <a:schemeClr val="accent2"/>
+    </dgm:linClrLst>
+    <dgm:effectClrLst/>
+    <dgm:txLinClrLst/>
+    <dgm:txFillClrLst meth="repeat">
+      <a:schemeClr val="dk1"/>
+    </dgm:txFillClrLst>
+    <dgm:txEffectClrLst/>
+  </dgm:styleLbl>
+  <dgm:styleLbl name="fgAcc4">
+    <dgm:fillClrLst meth="repeat">
+      <a:schemeClr val="lt1">
+        <a:alpha val="90000"/>
+      </a:schemeClr>
+    </dgm:fillClrLst>
+    <dgm:linClrLst meth="repeat">
+      <a:schemeClr val="accent2"/>
+    </dgm:linClrLst>
+    <dgm:effectClrLst/>
+    <dgm:txLinClrLst/>
+    <dgm:txFillClrLst meth="repeat">
+      <a:schemeClr val="dk1"/>
+    </dgm:txFillClrLst>
+    <dgm:txEffectClrLst/>
+  </dgm:styleLbl>
+  <dgm:styleLbl name="bgShp">
+    <dgm:fillClrLst meth="repeat">
+      <a:schemeClr val="accent2">
+        <a:tint val="40000"/>
+      </a:schemeClr>
+    </dgm:fillClrLst>
+    <dgm:linClrLst meth="repeat">
+      <a:schemeClr val="accent2"/>
+    </dgm:linClrLst>
+    <dgm:effectClrLst/>
+    <dgm:txLinClrLst/>
+    <dgm:txFillClrLst meth="repeat">
+      <a:schemeClr val="dk1"/>
+    </dgm:txFillClrLst>
+    <dgm:txEffectClrLst/>
+  </dgm:styleLbl>
+  <dgm:styleLbl name="dkBgShp">
+    <dgm:fillClrLst meth="repeat">
+      <a:schemeClr val="accent2">
+        <a:shade val="80000"/>
+      </a:schemeClr>
+    </dgm:fillClrLst>
+    <dgm:linClrLst meth="repeat">
+      <a:schemeClr val="accent2"/>
+    </dgm:linClrLst>
+    <dgm:effectClrLst/>
+    <dgm:txLinClrLst/>
+    <dgm:txFillClrLst meth="repeat">
+      <a:schemeClr val="lt1"/>
+    </dgm:txFillClrLst>
+    <dgm:txEffectClrLst/>
+  </dgm:styleLbl>
+  <dgm:styleLbl name="trBgShp">
+    <dgm:fillClrLst meth="repeat">
+      <a:schemeClr val="accent2">
+        <a:tint val="50000"/>
+        <a:alpha val="40000"/>
+      </a:schemeClr>
+    </dgm:fillClrLst>
+    <dgm:linClrLst meth="repeat">
+      <a:schemeClr val="accent2"/>
+    </dgm:linClrLst>
+    <dgm:effectClrLst/>
+    <dgm:txLinClrLst/>
+    <dgm:txFillClrLst meth="repeat">
+      <a:schemeClr val="lt1"/>
+    </dgm:txFillClrLst>
+    <dgm:txEffectClrLst/>
+  </dgm:styleLbl>
+  <dgm:styleLbl name="fgShp">
+    <dgm:fillClrLst meth="repeat">
+      <a:schemeClr val="accent2">
         <a:tint val="60000"/>
       </a:schemeClr>
     </dgm:fillClrLst>
@@ -4145,6 +4895,404 @@
     <dgm:cxn modelId="{98358225-AE09-43D1-BCCC-8244C7A83704}" type="presParOf" srcId="{5A391EC0-25EF-429F-9D54-610829D732D3}" destId="{9D7EF7DF-BB4E-4B7E-9E1B-EC18597E77A5}" srcOrd="1" destOrd="0" presId="urn:microsoft.com/office/officeart/2005/8/layout/list1"/>
     <dgm:cxn modelId="{E0FD204E-0658-42CA-B1D2-79069A3F0930}" type="presParOf" srcId="{875AC64A-FB9C-436A-9979-F31DE8C11288}" destId="{B76DC0A8-51A7-419A-BFDF-D655DDE8CF98}" srcOrd="9" destOrd="0" presId="urn:microsoft.com/office/officeart/2005/8/layout/list1"/>
     <dgm:cxn modelId="{F5BD81F7-CC0A-4619-BAFC-71E72CB89F7E}" type="presParOf" srcId="{875AC64A-FB9C-436A-9979-F31DE8C11288}" destId="{DF685ACD-B99D-49D1-8F9A-7CB6932B2CD9}" srcOrd="10" destOrd="0" presId="urn:microsoft.com/office/officeart/2005/8/layout/list1"/>
+  </dgm:cxnLst>
+  <dgm:bg/>
+  <dgm:whole/>
+  <dgm:extLst>
+    <a:ext uri="http://schemas.microsoft.com/office/drawing/2008/diagram">
+      <dsp:dataModelExt xmlns:dsp="http://schemas.microsoft.com/office/drawing/2008/diagram" relId="rId6" minVer="http://schemas.openxmlformats.org/drawingml/2006/diagram"/>
+    </a:ext>
+  </dgm:extLst>
+</dgm:dataModel>
+</file>
+
+<file path=ppt/diagrams/data4.xml><?xml version="1.0" encoding="utf-8"?>
+<dgm:dataModel xmlns:dgm="http://schemas.openxmlformats.org/drawingml/2006/diagram" xmlns:a="http://schemas.openxmlformats.org/drawingml/2006/main">
+  <dgm:ptLst>
+    <dgm:pt modelId="{18B5F4AB-AF44-4097-9F43-D86B356597D9}" type="doc">
+      <dgm:prSet loTypeId="urn:microsoft.com/office/officeart/2018/2/layout/IconVerticalSolidList" loCatId="icon" qsTypeId="urn:microsoft.com/office/officeart/2005/8/quickstyle/simple1" qsCatId="simple" csTypeId="urn:microsoft.com/office/officeart/2005/8/colors/accent2_2" csCatId="accent2" phldr="1"/>
+      <dgm:spPr/>
+      <dgm:t>
+        <a:bodyPr/>
+        <a:lstStyle/>
+        <a:p>
+          <a:endParaRPr lang="en-US"/>
+        </a:p>
+      </dgm:t>
+    </dgm:pt>
+    <dgm:pt modelId="{96E4D710-F027-4FD1-9909-D2369D7C4E5D}">
+      <dgm:prSet/>
+      <dgm:spPr/>
+      <dgm:t>
+        <a:bodyPr/>
+        <a:lstStyle/>
+        <a:p>
+          <a:r>
+            <a:rPr lang="fr-FR"/>
+            <a:t>Les fournisseurs de LLM proposent des SaaS privatifs</a:t>
+          </a:r>
+          <a:endParaRPr lang="en-US"/>
+        </a:p>
+      </dgm:t>
+    </dgm:pt>
+    <dgm:pt modelId="{4A9CB4BD-ECFD-427B-AB7A-7B85DBA0FD88}" type="parTrans" cxnId="{E1F99A7A-22F8-4034-AB29-F90E499B83B2}">
+      <dgm:prSet/>
+      <dgm:spPr/>
+      <dgm:t>
+        <a:bodyPr/>
+        <a:lstStyle/>
+        <a:p>
+          <a:endParaRPr lang="en-US"/>
+        </a:p>
+      </dgm:t>
+    </dgm:pt>
+    <dgm:pt modelId="{FC3F47EB-6E46-473C-864C-CB6E674DC8B5}" type="sibTrans" cxnId="{E1F99A7A-22F8-4034-AB29-F90E499B83B2}">
+      <dgm:prSet/>
+      <dgm:spPr/>
+      <dgm:t>
+        <a:bodyPr/>
+        <a:lstStyle/>
+        <a:p>
+          <a:endParaRPr lang="en-US"/>
+        </a:p>
+      </dgm:t>
+    </dgm:pt>
+    <dgm:pt modelId="{29943875-980E-405C-9FD8-0C22800ACC9A}">
+      <dgm:prSet/>
+      <dgm:spPr/>
+      <dgm:t>
+        <a:bodyPr/>
+        <a:lstStyle/>
+        <a:p>
+          <a:r>
+            <a:rPr lang="fr-FR"/>
+            <a:t>Tarifs TRES variables</a:t>
+          </a:r>
+          <a:endParaRPr lang="en-US"/>
+        </a:p>
+      </dgm:t>
+    </dgm:pt>
+    <dgm:pt modelId="{E40A295C-128F-45DB-BC0B-4D32CA639C20}" type="parTrans" cxnId="{E2ED8827-1F7C-4FA6-B365-2B660BD9742A}">
+      <dgm:prSet/>
+      <dgm:spPr/>
+      <dgm:t>
+        <a:bodyPr/>
+        <a:lstStyle/>
+        <a:p>
+          <a:endParaRPr lang="en-US"/>
+        </a:p>
+      </dgm:t>
+    </dgm:pt>
+    <dgm:pt modelId="{15C61DD6-8D62-47DE-A41D-CD99413BC856}" type="sibTrans" cxnId="{E2ED8827-1F7C-4FA6-B365-2B660BD9742A}">
+      <dgm:prSet/>
+      <dgm:spPr/>
+      <dgm:t>
+        <a:bodyPr/>
+        <a:lstStyle/>
+        <a:p>
+          <a:endParaRPr lang="en-US"/>
+        </a:p>
+      </dgm:t>
+    </dgm:pt>
+    <dgm:pt modelId="{66395671-DBE5-417A-917C-2824DC5D865D}">
+      <dgm:prSet/>
+      <dgm:spPr/>
+      <dgm:t>
+        <a:bodyPr/>
+        <a:lstStyle/>
+        <a:p>
+          <a:r>
+            <a:rPr lang="fr-FR"/>
+            <a:t>Les fournisseurs de clouds classiques proposent des SaaS et PaaS des LLM open sources</a:t>
+          </a:r>
+          <a:endParaRPr lang="en-US"/>
+        </a:p>
+      </dgm:t>
+    </dgm:pt>
+    <dgm:pt modelId="{56DCAE83-BDCA-4249-8EB1-3F1B9A3A37AB}" type="parTrans" cxnId="{E6234517-9293-41EE-8291-E6B9C0A99DD9}">
+      <dgm:prSet/>
+      <dgm:spPr/>
+      <dgm:t>
+        <a:bodyPr/>
+        <a:lstStyle/>
+        <a:p>
+          <a:endParaRPr lang="en-US"/>
+        </a:p>
+      </dgm:t>
+    </dgm:pt>
+    <dgm:pt modelId="{B3B6AF80-2865-444D-AB7A-1D69BAF2A94C}" type="sibTrans" cxnId="{E6234517-9293-41EE-8291-E6B9C0A99DD9}">
+      <dgm:prSet/>
+      <dgm:spPr/>
+      <dgm:t>
+        <a:bodyPr/>
+        <a:lstStyle/>
+        <a:p>
+          <a:endParaRPr lang="en-US"/>
+        </a:p>
+      </dgm:t>
+    </dgm:pt>
+    <dgm:pt modelId="{E7C694EA-FB47-470F-B03A-359C30528FFF}">
+      <dgm:prSet/>
+      <dgm:spPr/>
+      <dgm:t>
+        <a:bodyPr/>
+        <a:lstStyle/>
+        <a:p>
+          <a:r>
+            <a:rPr lang="fr-FR"/>
+            <a:t>AWS</a:t>
+          </a:r>
+          <a:endParaRPr lang="en-US"/>
+        </a:p>
+      </dgm:t>
+    </dgm:pt>
+    <dgm:pt modelId="{E9863212-0626-4E36-86AC-9554FAED35A7}" type="parTrans" cxnId="{5B4BFF73-A75A-473A-8C6D-F0FFA6B9684E}">
+      <dgm:prSet/>
+      <dgm:spPr/>
+      <dgm:t>
+        <a:bodyPr/>
+        <a:lstStyle/>
+        <a:p>
+          <a:endParaRPr lang="en-US"/>
+        </a:p>
+      </dgm:t>
+    </dgm:pt>
+    <dgm:pt modelId="{F89DF497-2516-4419-A870-B3FBE0AF2992}" type="sibTrans" cxnId="{5B4BFF73-A75A-473A-8C6D-F0FFA6B9684E}">
+      <dgm:prSet/>
+      <dgm:spPr/>
+      <dgm:t>
+        <a:bodyPr/>
+        <a:lstStyle/>
+        <a:p>
+          <a:endParaRPr lang="en-US"/>
+        </a:p>
+      </dgm:t>
+    </dgm:pt>
+    <dgm:pt modelId="{334A4898-F7E1-49DD-9BFF-AF985CB7E4AA}">
+      <dgm:prSet/>
+      <dgm:spPr/>
+      <dgm:t>
+        <a:bodyPr/>
+        <a:lstStyle/>
+        <a:p>
+          <a:r>
+            <a:rPr lang="fr-FR"/>
+            <a:t>GCP</a:t>
+          </a:r>
+          <a:endParaRPr lang="en-US"/>
+        </a:p>
+      </dgm:t>
+    </dgm:pt>
+    <dgm:pt modelId="{EE98888E-65CE-4AE0-838C-E3B8D8B36DD5}" type="parTrans" cxnId="{E22BBB90-030E-46E9-B90F-D70DD5E002D3}">
+      <dgm:prSet/>
+      <dgm:spPr/>
+      <dgm:t>
+        <a:bodyPr/>
+        <a:lstStyle/>
+        <a:p>
+          <a:endParaRPr lang="en-US"/>
+        </a:p>
+      </dgm:t>
+    </dgm:pt>
+    <dgm:pt modelId="{1FE0179B-236E-4AB3-BF81-C3DCA34474D6}" type="sibTrans" cxnId="{E22BBB90-030E-46E9-B90F-D70DD5E002D3}">
+      <dgm:prSet/>
+      <dgm:spPr/>
+      <dgm:t>
+        <a:bodyPr/>
+        <a:lstStyle/>
+        <a:p>
+          <a:endParaRPr lang="en-US"/>
+        </a:p>
+      </dgm:t>
+    </dgm:pt>
+    <dgm:pt modelId="{B7816A4D-7F6C-4C28-9836-6A98A896C32D}">
+      <dgm:prSet/>
+      <dgm:spPr/>
+      <dgm:t>
+        <a:bodyPr/>
+        <a:lstStyle/>
+        <a:p>
+          <a:r>
+            <a:rPr lang="fr-FR"/>
+            <a:t>Azure</a:t>
+          </a:r>
+          <a:endParaRPr lang="en-US"/>
+        </a:p>
+      </dgm:t>
+    </dgm:pt>
+    <dgm:pt modelId="{94689688-7EF6-4058-8D28-78B9F3A99318}" type="parTrans" cxnId="{B8C8D1EB-0568-4E97-9E37-468CABFF0C43}">
+      <dgm:prSet/>
+      <dgm:spPr/>
+      <dgm:t>
+        <a:bodyPr/>
+        <a:lstStyle/>
+        <a:p>
+          <a:endParaRPr lang="en-US"/>
+        </a:p>
+      </dgm:t>
+    </dgm:pt>
+    <dgm:pt modelId="{469D764F-4780-4B51-BC53-ACCC6D08A064}" type="sibTrans" cxnId="{B8C8D1EB-0568-4E97-9E37-468CABFF0C43}">
+      <dgm:prSet/>
+      <dgm:spPr/>
+      <dgm:t>
+        <a:bodyPr/>
+        <a:lstStyle/>
+        <a:p>
+          <a:endParaRPr lang="en-US"/>
+        </a:p>
+      </dgm:t>
+    </dgm:pt>
+    <dgm:pt modelId="{500FE025-B882-4092-8BC2-ABC7A51E2065}" type="pres">
+      <dgm:prSet presAssocID="{18B5F4AB-AF44-4097-9F43-D86B356597D9}" presName="root" presStyleCnt="0">
+        <dgm:presLayoutVars>
+          <dgm:dir/>
+          <dgm:resizeHandles val="exact"/>
+        </dgm:presLayoutVars>
+      </dgm:prSet>
+      <dgm:spPr/>
+    </dgm:pt>
+    <dgm:pt modelId="{720515F8-B26D-4770-AF1B-95F146F703CE}" type="pres">
+      <dgm:prSet presAssocID="{96E4D710-F027-4FD1-9909-D2369D7C4E5D}" presName="compNode" presStyleCnt="0"/>
+      <dgm:spPr/>
+    </dgm:pt>
+    <dgm:pt modelId="{44D1BB5A-0C04-4913-9DA8-84A3FEE7095A}" type="pres">
+      <dgm:prSet presAssocID="{96E4D710-F027-4FD1-9909-D2369D7C4E5D}" presName="bgRect" presStyleLbl="bgShp" presStyleIdx="0" presStyleCnt="2"/>
+      <dgm:spPr/>
+    </dgm:pt>
+    <dgm:pt modelId="{2606E1A7-E858-4522-8EA4-F5F0DE20C724}" type="pres">
+      <dgm:prSet presAssocID="{96E4D710-F027-4FD1-9909-D2369D7C4E5D}" presName="iconRect" presStyleLbl="node1" presStyleIdx="0" presStyleCnt="2"/>
+      <dgm:spPr>
+        <a:blipFill>
+          <a:blip xmlns:r="http://schemas.openxmlformats.org/officeDocument/2006/relationships" r:embed="rId1">
+            <a:extLst>
+              <a:ext uri="{28A0092B-C50C-407E-A947-70E740481C1C}">
+                <a14:useLocalDpi xmlns:a14="http://schemas.microsoft.com/office/drawing/2010/main" val="0"/>
+              </a:ext>
+              <a:ext uri="{96DAC541-7B7A-43D3-8B79-37D633B846F1}">
+                <asvg:svgBlip xmlns:asvg="http://schemas.microsoft.com/office/drawing/2016/SVG/main" r:embed="rId2"/>
+              </a:ext>
+            </a:extLst>
+          </a:blip>
+          <a:stretch>
+            <a:fillRect/>
+          </a:stretch>
+        </a:blipFill>
+        <a:ln>
+          <a:noFill/>
+        </a:ln>
+      </dgm:spPr>
+      <dgm:extLst>
+        <a:ext uri="{E40237B7-FDA0-4F09-8148-C483321AD2D9}">
+          <dgm14:cNvPr xmlns:dgm14="http://schemas.microsoft.com/office/drawing/2010/diagram" id="0" name="" descr="Coche"/>
+        </a:ext>
+      </dgm:extLst>
+    </dgm:pt>
+    <dgm:pt modelId="{43D65FAC-2EBF-4F33-BFCD-E546F6B4E1CE}" type="pres">
+      <dgm:prSet presAssocID="{96E4D710-F027-4FD1-9909-D2369D7C4E5D}" presName="spaceRect" presStyleCnt="0"/>
+      <dgm:spPr/>
+    </dgm:pt>
+    <dgm:pt modelId="{5BEFF36F-5F40-4D46-BE7C-3C6D2B443173}" type="pres">
+      <dgm:prSet presAssocID="{96E4D710-F027-4FD1-9909-D2369D7C4E5D}" presName="parTx" presStyleLbl="revTx" presStyleIdx="0" presStyleCnt="4">
+        <dgm:presLayoutVars>
+          <dgm:chMax val="0"/>
+          <dgm:chPref val="0"/>
+        </dgm:presLayoutVars>
+      </dgm:prSet>
+      <dgm:spPr/>
+    </dgm:pt>
+    <dgm:pt modelId="{3EC854B7-D5DF-4DD2-97F9-2AD76CC73EDA}" type="pres">
+      <dgm:prSet presAssocID="{96E4D710-F027-4FD1-9909-D2369D7C4E5D}" presName="desTx" presStyleLbl="revTx" presStyleIdx="1" presStyleCnt="4">
+        <dgm:presLayoutVars/>
+      </dgm:prSet>
+      <dgm:spPr/>
+    </dgm:pt>
+    <dgm:pt modelId="{CC894634-22CD-435D-81AD-0F5EF2FD98A3}" type="pres">
+      <dgm:prSet presAssocID="{FC3F47EB-6E46-473C-864C-CB6E674DC8B5}" presName="sibTrans" presStyleCnt="0"/>
+      <dgm:spPr/>
+    </dgm:pt>
+    <dgm:pt modelId="{FDEF85AB-204E-4177-97AA-429F57746BEF}" type="pres">
+      <dgm:prSet presAssocID="{66395671-DBE5-417A-917C-2824DC5D865D}" presName="compNode" presStyleCnt="0"/>
+      <dgm:spPr/>
+    </dgm:pt>
+    <dgm:pt modelId="{075EBBA1-E8F9-4A57-B94F-1C4017C2CC7A}" type="pres">
+      <dgm:prSet presAssocID="{66395671-DBE5-417A-917C-2824DC5D865D}" presName="bgRect" presStyleLbl="bgShp" presStyleIdx="1" presStyleCnt="2"/>
+      <dgm:spPr/>
+    </dgm:pt>
+    <dgm:pt modelId="{BDB17737-BBC0-40FF-A2FB-BBCA3105D3D7}" type="pres">
+      <dgm:prSet presAssocID="{66395671-DBE5-417A-917C-2824DC5D865D}" presName="iconRect" presStyleLbl="node1" presStyleIdx="1" presStyleCnt="2"/>
+      <dgm:spPr>
+        <a:blipFill>
+          <a:blip xmlns:r="http://schemas.openxmlformats.org/officeDocument/2006/relationships" r:embed="rId3">
+            <a:extLst>
+              <a:ext uri="{28A0092B-C50C-407E-A947-70E740481C1C}">
+                <a14:useLocalDpi xmlns:a14="http://schemas.microsoft.com/office/drawing/2010/main" val="0"/>
+              </a:ext>
+              <a:ext uri="{96DAC541-7B7A-43D3-8B79-37D633B846F1}">
+                <asvg:svgBlip xmlns:asvg="http://schemas.microsoft.com/office/drawing/2016/SVG/main" r:embed="rId4"/>
+              </a:ext>
+            </a:extLst>
+          </a:blip>
+          <a:stretch>
+            <a:fillRect/>
+          </a:stretch>
+        </a:blipFill>
+        <a:ln>
+          <a:noFill/>
+        </a:ln>
+      </dgm:spPr>
+      <dgm:extLst>
+        <a:ext uri="{E40237B7-FDA0-4F09-8148-C483321AD2D9}">
+          <dgm14:cNvPr xmlns:dgm14="http://schemas.microsoft.com/office/drawing/2010/diagram" id="0" name="" descr="Nuage"/>
+        </a:ext>
+      </dgm:extLst>
+    </dgm:pt>
+    <dgm:pt modelId="{896BBBFF-A122-4ADF-A6A8-79B053C79202}" type="pres">
+      <dgm:prSet presAssocID="{66395671-DBE5-417A-917C-2824DC5D865D}" presName="spaceRect" presStyleCnt="0"/>
+      <dgm:spPr/>
+    </dgm:pt>
+    <dgm:pt modelId="{781E368C-A4D5-4009-B21E-8273F3D733EB}" type="pres">
+      <dgm:prSet presAssocID="{66395671-DBE5-417A-917C-2824DC5D865D}" presName="parTx" presStyleLbl="revTx" presStyleIdx="2" presStyleCnt="4">
+        <dgm:presLayoutVars>
+          <dgm:chMax val="0"/>
+          <dgm:chPref val="0"/>
+        </dgm:presLayoutVars>
+      </dgm:prSet>
+      <dgm:spPr/>
+    </dgm:pt>
+    <dgm:pt modelId="{A4C6D6CB-D74A-428C-879F-53818722A8C4}" type="pres">
+      <dgm:prSet presAssocID="{66395671-DBE5-417A-917C-2824DC5D865D}" presName="desTx" presStyleLbl="revTx" presStyleIdx="3" presStyleCnt="4">
+        <dgm:presLayoutVars/>
+      </dgm:prSet>
+      <dgm:spPr/>
+    </dgm:pt>
+  </dgm:ptLst>
+  <dgm:cxnLst>
+    <dgm:cxn modelId="{9686EB12-9CBA-4F3B-BD42-16E5C2F978E2}" type="presOf" srcId="{96E4D710-F027-4FD1-9909-D2369D7C4E5D}" destId="{5BEFF36F-5F40-4D46-BE7C-3C6D2B443173}" srcOrd="0" destOrd="0" presId="urn:microsoft.com/office/officeart/2018/2/layout/IconVerticalSolidList"/>
+    <dgm:cxn modelId="{E6234517-9293-41EE-8291-E6B9C0A99DD9}" srcId="{18B5F4AB-AF44-4097-9F43-D86B356597D9}" destId="{66395671-DBE5-417A-917C-2824DC5D865D}" srcOrd="1" destOrd="0" parTransId="{56DCAE83-BDCA-4249-8EB1-3F1B9A3A37AB}" sibTransId="{B3B6AF80-2865-444D-AB7A-1D69BAF2A94C}"/>
+    <dgm:cxn modelId="{E2ED8827-1F7C-4FA6-B365-2B660BD9742A}" srcId="{96E4D710-F027-4FD1-9909-D2369D7C4E5D}" destId="{29943875-980E-405C-9FD8-0C22800ACC9A}" srcOrd="0" destOrd="0" parTransId="{E40A295C-128F-45DB-BC0B-4D32CA639C20}" sibTransId="{15C61DD6-8D62-47DE-A41D-CD99413BC856}"/>
+    <dgm:cxn modelId="{8C9B1549-43DE-4755-AA52-162813560159}" type="presOf" srcId="{66395671-DBE5-417A-917C-2824DC5D865D}" destId="{781E368C-A4D5-4009-B21E-8273F3D733EB}" srcOrd="0" destOrd="0" presId="urn:microsoft.com/office/officeart/2018/2/layout/IconVerticalSolidList"/>
+    <dgm:cxn modelId="{689B3873-74AC-4846-BC53-A6BD3E3CDA56}" type="presOf" srcId="{18B5F4AB-AF44-4097-9F43-D86B356597D9}" destId="{500FE025-B882-4092-8BC2-ABC7A51E2065}" srcOrd="0" destOrd="0" presId="urn:microsoft.com/office/officeart/2018/2/layout/IconVerticalSolidList"/>
+    <dgm:cxn modelId="{5B4BFF73-A75A-473A-8C6D-F0FFA6B9684E}" srcId="{66395671-DBE5-417A-917C-2824DC5D865D}" destId="{E7C694EA-FB47-470F-B03A-359C30528FFF}" srcOrd="0" destOrd="0" parTransId="{E9863212-0626-4E36-86AC-9554FAED35A7}" sibTransId="{F89DF497-2516-4419-A870-B3FBE0AF2992}"/>
+    <dgm:cxn modelId="{ECEF1174-FC37-4CC0-A77C-3C63E2400C0B}" type="presOf" srcId="{E7C694EA-FB47-470F-B03A-359C30528FFF}" destId="{A4C6D6CB-D74A-428C-879F-53818722A8C4}" srcOrd="0" destOrd="0" presId="urn:microsoft.com/office/officeart/2018/2/layout/IconVerticalSolidList"/>
+    <dgm:cxn modelId="{E1F99A7A-22F8-4034-AB29-F90E499B83B2}" srcId="{18B5F4AB-AF44-4097-9F43-D86B356597D9}" destId="{96E4D710-F027-4FD1-9909-D2369D7C4E5D}" srcOrd="0" destOrd="0" parTransId="{4A9CB4BD-ECFD-427B-AB7A-7B85DBA0FD88}" sibTransId="{FC3F47EB-6E46-473C-864C-CB6E674DC8B5}"/>
+    <dgm:cxn modelId="{E22BBB90-030E-46E9-B90F-D70DD5E002D3}" srcId="{66395671-DBE5-417A-917C-2824DC5D865D}" destId="{334A4898-F7E1-49DD-9BFF-AF985CB7E4AA}" srcOrd="1" destOrd="0" parTransId="{EE98888E-65CE-4AE0-838C-E3B8D8B36DD5}" sibTransId="{1FE0179B-236E-4AB3-BF81-C3DCA34474D6}"/>
+    <dgm:cxn modelId="{DE81CEA0-5A93-423E-9AA7-586467DC4C82}" type="presOf" srcId="{29943875-980E-405C-9FD8-0C22800ACC9A}" destId="{3EC854B7-D5DF-4DD2-97F9-2AD76CC73EDA}" srcOrd="0" destOrd="0" presId="urn:microsoft.com/office/officeart/2018/2/layout/IconVerticalSolidList"/>
+    <dgm:cxn modelId="{D24CA1E4-C4AD-4B5D-A6E7-6B4C195EDA73}" type="presOf" srcId="{334A4898-F7E1-49DD-9BFF-AF985CB7E4AA}" destId="{A4C6D6CB-D74A-428C-879F-53818722A8C4}" srcOrd="0" destOrd="1" presId="urn:microsoft.com/office/officeart/2018/2/layout/IconVerticalSolidList"/>
+    <dgm:cxn modelId="{B8C8D1EB-0568-4E97-9E37-468CABFF0C43}" srcId="{66395671-DBE5-417A-917C-2824DC5D865D}" destId="{B7816A4D-7F6C-4C28-9836-6A98A896C32D}" srcOrd="2" destOrd="0" parTransId="{94689688-7EF6-4058-8D28-78B9F3A99318}" sibTransId="{469D764F-4780-4B51-BC53-ACCC6D08A064}"/>
+    <dgm:cxn modelId="{88FAECFF-6E59-4280-B4E7-CA54D403380C}" type="presOf" srcId="{B7816A4D-7F6C-4C28-9836-6A98A896C32D}" destId="{A4C6D6CB-D74A-428C-879F-53818722A8C4}" srcOrd="0" destOrd="2" presId="urn:microsoft.com/office/officeart/2018/2/layout/IconVerticalSolidList"/>
+    <dgm:cxn modelId="{1CF13774-55E2-4679-BB3F-5EE8E449C2DC}" type="presParOf" srcId="{500FE025-B882-4092-8BC2-ABC7A51E2065}" destId="{720515F8-B26D-4770-AF1B-95F146F703CE}" srcOrd="0" destOrd="0" presId="urn:microsoft.com/office/officeart/2018/2/layout/IconVerticalSolidList"/>
+    <dgm:cxn modelId="{08CEC326-C460-483D-ACCF-E5A01DA30728}" type="presParOf" srcId="{720515F8-B26D-4770-AF1B-95F146F703CE}" destId="{44D1BB5A-0C04-4913-9DA8-84A3FEE7095A}" srcOrd="0" destOrd="0" presId="urn:microsoft.com/office/officeart/2018/2/layout/IconVerticalSolidList"/>
+    <dgm:cxn modelId="{A407B93B-ECB3-4517-A0DF-5B857E168056}" type="presParOf" srcId="{720515F8-B26D-4770-AF1B-95F146F703CE}" destId="{2606E1A7-E858-4522-8EA4-F5F0DE20C724}" srcOrd="1" destOrd="0" presId="urn:microsoft.com/office/officeart/2018/2/layout/IconVerticalSolidList"/>
+    <dgm:cxn modelId="{7E44096D-B82D-4EF5-B348-C5483C7A1BB9}" type="presParOf" srcId="{720515F8-B26D-4770-AF1B-95F146F703CE}" destId="{43D65FAC-2EBF-4F33-BFCD-E546F6B4E1CE}" srcOrd="2" destOrd="0" presId="urn:microsoft.com/office/officeart/2018/2/layout/IconVerticalSolidList"/>
+    <dgm:cxn modelId="{7DF4E51F-0A35-4CF4-ABAB-DC1E014318D7}" type="presParOf" srcId="{720515F8-B26D-4770-AF1B-95F146F703CE}" destId="{5BEFF36F-5F40-4D46-BE7C-3C6D2B443173}" srcOrd="3" destOrd="0" presId="urn:microsoft.com/office/officeart/2018/2/layout/IconVerticalSolidList"/>
+    <dgm:cxn modelId="{EBAF2D85-4FC1-4449-956B-72E9F026844E}" type="presParOf" srcId="{720515F8-B26D-4770-AF1B-95F146F703CE}" destId="{3EC854B7-D5DF-4DD2-97F9-2AD76CC73EDA}" srcOrd="4" destOrd="0" presId="urn:microsoft.com/office/officeart/2018/2/layout/IconVerticalSolidList"/>
+    <dgm:cxn modelId="{42E1BB33-FE04-4854-981E-F0C60C729C2F}" type="presParOf" srcId="{500FE025-B882-4092-8BC2-ABC7A51E2065}" destId="{CC894634-22CD-435D-81AD-0F5EF2FD98A3}" srcOrd="1" destOrd="0" presId="urn:microsoft.com/office/officeart/2018/2/layout/IconVerticalSolidList"/>
+    <dgm:cxn modelId="{8445D7E3-E969-430F-A3AA-DE9E79AF302B}" type="presParOf" srcId="{500FE025-B882-4092-8BC2-ABC7A51E2065}" destId="{FDEF85AB-204E-4177-97AA-429F57746BEF}" srcOrd="2" destOrd="0" presId="urn:microsoft.com/office/officeart/2018/2/layout/IconVerticalSolidList"/>
+    <dgm:cxn modelId="{359068BF-4ACF-4453-A320-0497595959D5}" type="presParOf" srcId="{FDEF85AB-204E-4177-97AA-429F57746BEF}" destId="{075EBBA1-E8F9-4A57-B94F-1C4017C2CC7A}" srcOrd="0" destOrd="0" presId="urn:microsoft.com/office/officeart/2018/2/layout/IconVerticalSolidList"/>
+    <dgm:cxn modelId="{0CAFFF13-A0BA-4829-AFFF-0AE1E719372B}" type="presParOf" srcId="{FDEF85AB-204E-4177-97AA-429F57746BEF}" destId="{BDB17737-BBC0-40FF-A2FB-BBCA3105D3D7}" srcOrd="1" destOrd="0" presId="urn:microsoft.com/office/officeart/2018/2/layout/IconVerticalSolidList"/>
+    <dgm:cxn modelId="{FEEACCE9-58C3-4EEC-9D18-53CFE702938B}" type="presParOf" srcId="{FDEF85AB-204E-4177-97AA-429F57746BEF}" destId="{896BBBFF-A122-4ADF-A6A8-79B053C79202}" srcOrd="2" destOrd="0" presId="urn:microsoft.com/office/officeart/2018/2/layout/IconVerticalSolidList"/>
+    <dgm:cxn modelId="{61B9F5E0-8260-444B-A4F7-921CF2CF72F1}" type="presParOf" srcId="{FDEF85AB-204E-4177-97AA-429F57746BEF}" destId="{781E368C-A4D5-4009-B21E-8273F3D733EB}" srcOrd="3" destOrd="0" presId="urn:microsoft.com/office/officeart/2018/2/layout/IconVerticalSolidList"/>
+    <dgm:cxn modelId="{1E5BEC79-C778-4CA7-8951-3C86A6D01D3A}" type="presParOf" srcId="{FDEF85AB-204E-4177-97AA-429F57746BEF}" destId="{A4C6D6CB-D74A-428C-879F-53818722A8C4}" srcOrd="4" destOrd="0" presId="urn:microsoft.com/office/officeart/2018/2/layout/IconVerticalSolidList"/>
   </dgm:cxnLst>
   <dgm:bg/>
   <dgm:whole/>
@@ -6233,6 +7381,482 @@
 </dsp:drawing>
 </file>
 
+<file path=ppt/diagrams/drawing4.xml><?xml version="1.0" encoding="utf-8"?>
+<dsp:drawing xmlns:dgm="http://schemas.openxmlformats.org/drawingml/2006/diagram" xmlns:dsp="http://schemas.microsoft.com/office/drawing/2008/diagram" xmlns:a="http://schemas.openxmlformats.org/drawingml/2006/main">
+  <dsp:spTree>
+    <dsp:nvGrpSpPr>
+      <dsp:cNvPr id="0" name=""/>
+      <dsp:cNvGrpSpPr/>
+    </dsp:nvGrpSpPr>
+    <dsp:grpSpPr/>
+    <dsp:sp modelId="{44D1BB5A-0C04-4913-9DA8-84A3FEE7095A}">
+      <dsp:nvSpPr>
+        <dsp:cNvPr id="0" name=""/>
+        <dsp:cNvSpPr/>
+      </dsp:nvSpPr>
+      <dsp:spPr>
+        <a:xfrm>
+          <a:off x="0" y="819090"/>
+          <a:ext cx="8766051" cy="1512168"/>
+        </a:xfrm>
+        <a:prstGeom prst="roundRect">
+          <a:avLst>
+            <a:gd name="adj" fmla="val 10000"/>
+          </a:avLst>
+        </a:prstGeom>
+        <a:solidFill>
+          <a:schemeClr val="accent2">
+            <a:tint val="40000"/>
+            <a:hueOff val="0"/>
+            <a:satOff val="0"/>
+            <a:lumOff val="0"/>
+            <a:alphaOff val="0"/>
+          </a:schemeClr>
+        </a:solidFill>
+        <a:ln>
+          <a:noFill/>
+        </a:ln>
+        <a:effectLst/>
+      </dsp:spPr>
+      <dsp:style>
+        <a:lnRef idx="0">
+          <a:scrgbClr r="0" g="0" b="0"/>
+        </a:lnRef>
+        <a:fillRef idx="1">
+          <a:scrgbClr r="0" g="0" b="0"/>
+        </a:fillRef>
+        <a:effectRef idx="0">
+          <a:scrgbClr r="0" g="0" b="0"/>
+        </a:effectRef>
+        <a:fontRef idx="minor"/>
+      </dsp:style>
+    </dsp:sp>
+    <dsp:sp modelId="{2606E1A7-E858-4522-8EA4-F5F0DE20C724}">
+      <dsp:nvSpPr>
+        <dsp:cNvPr id="0" name=""/>
+        <dsp:cNvSpPr/>
+      </dsp:nvSpPr>
+      <dsp:spPr>
+        <a:xfrm>
+          <a:off x="457430" y="1159328"/>
+          <a:ext cx="831692" cy="831692"/>
+        </a:xfrm>
+        <a:prstGeom prst="rect">
+          <a:avLst/>
+        </a:prstGeom>
+        <a:blipFill>
+          <a:blip xmlns:r="http://schemas.openxmlformats.org/officeDocument/2006/relationships" r:embed="rId1">
+            <a:extLst>
+              <a:ext uri="{28A0092B-C50C-407E-A947-70E740481C1C}">
+                <a14:useLocalDpi xmlns:a14="http://schemas.microsoft.com/office/drawing/2010/main" val="0"/>
+              </a:ext>
+              <a:ext uri="{96DAC541-7B7A-43D3-8B79-37D633B846F1}">
+                <asvg:svgBlip xmlns:asvg="http://schemas.microsoft.com/office/drawing/2016/SVG/main" r:embed="rId2"/>
+              </a:ext>
+            </a:extLst>
+          </a:blip>
+          <a:stretch>
+            <a:fillRect/>
+          </a:stretch>
+        </a:blipFill>
+        <a:ln w="25400" cap="flat" cmpd="sng" algn="ctr">
+          <a:noFill/>
+          <a:prstDash val="solid"/>
+        </a:ln>
+        <a:effectLst/>
+      </dsp:spPr>
+      <dsp:style>
+        <a:lnRef idx="2">
+          <a:scrgbClr r="0" g="0" b="0"/>
+        </a:lnRef>
+        <a:fillRef idx="1">
+          <a:scrgbClr r="0" g="0" b="0"/>
+        </a:fillRef>
+        <a:effectRef idx="0">
+          <a:scrgbClr r="0" g="0" b="0"/>
+        </a:effectRef>
+        <a:fontRef idx="minor">
+          <a:schemeClr val="lt1"/>
+        </a:fontRef>
+      </dsp:style>
+    </dsp:sp>
+    <dsp:sp modelId="{5BEFF36F-5F40-4D46-BE7C-3C6D2B443173}">
+      <dsp:nvSpPr>
+        <dsp:cNvPr id="0" name=""/>
+        <dsp:cNvSpPr/>
+      </dsp:nvSpPr>
+      <dsp:spPr>
+        <a:xfrm>
+          <a:off x="1746554" y="819090"/>
+          <a:ext cx="3944722" cy="1512168"/>
+        </a:xfrm>
+        <a:prstGeom prst="rect">
+          <a:avLst/>
+        </a:prstGeom>
+        <a:noFill/>
+        <a:ln>
+          <a:noFill/>
+        </a:ln>
+        <a:effectLst/>
+      </dsp:spPr>
+      <dsp:style>
+        <a:lnRef idx="0">
+          <a:scrgbClr r="0" g="0" b="0"/>
+        </a:lnRef>
+        <a:fillRef idx="0">
+          <a:scrgbClr r="0" g="0" b="0"/>
+        </a:fillRef>
+        <a:effectRef idx="0">
+          <a:scrgbClr r="0" g="0" b="0"/>
+        </a:effectRef>
+        <a:fontRef idx="minor"/>
+      </dsp:style>
+      <dsp:txBody>
+        <a:bodyPr spcFirstLastPara="0" vert="horz" wrap="square" lIns="160038" tIns="160038" rIns="160038" bIns="160038" numCol="1" spcCol="1270" anchor="ctr" anchorCtr="0">
+          <a:noAutofit/>
+        </a:bodyPr>
+        <a:lstStyle/>
+        <a:p>
+          <a:pPr marL="0" lvl="0" indent="0" algn="l" defTabSz="977900">
+            <a:lnSpc>
+              <a:spcPct val="90000"/>
+            </a:lnSpc>
+            <a:spcBef>
+              <a:spcPct val="0"/>
+            </a:spcBef>
+            <a:spcAft>
+              <a:spcPct val="35000"/>
+            </a:spcAft>
+            <a:buNone/>
+          </a:pPr>
+          <a:r>
+            <a:rPr lang="fr-FR" sz="2200" kern="1200"/>
+            <a:t>Les fournisseurs de LLM proposent des SaaS privatifs</a:t>
+          </a:r>
+          <a:endParaRPr lang="en-US" sz="2200" kern="1200"/>
+        </a:p>
+      </dsp:txBody>
+      <dsp:txXfrm>
+        <a:off x="1746554" y="819090"/>
+        <a:ext cx="3944722" cy="1512168"/>
+      </dsp:txXfrm>
+    </dsp:sp>
+    <dsp:sp modelId="{3EC854B7-D5DF-4DD2-97F9-2AD76CC73EDA}">
+      <dsp:nvSpPr>
+        <dsp:cNvPr id="0" name=""/>
+        <dsp:cNvSpPr/>
+      </dsp:nvSpPr>
+      <dsp:spPr>
+        <a:xfrm>
+          <a:off x="5691276" y="819090"/>
+          <a:ext cx="3074774" cy="1512168"/>
+        </a:xfrm>
+        <a:prstGeom prst="rect">
+          <a:avLst/>
+        </a:prstGeom>
+        <a:noFill/>
+        <a:ln>
+          <a:noFill/>
+        </a:ln>
+        <a:effectLst/>
+      </dsp:spPr>
+      <dsp:style>
+        <a:lnRef idx="0">
+          <a:scrgbClr r="0" g="0" b="0"/>
+        </a:lnRef>
+        <a:fillRef idx="0">
+          <a:scrgbClr r="0" g="0" b="0"/>
+        </a:fillRef>
+        <a:effectRef idx="0">
+          <a:scrgbClr r="0" g="0" b="0"/>
+        </a:effectRef>
+        <a:fontRef idx="minor"/>
+      </dsp:style>
+      <dsp:txBody>
+        <a:bodyPr spcFirstLastPara="0" vert="horz" wrap="square" lIns="160038" tIns="160038" rIns="160038" bIns="160038" numCol="1" spcCol="1270" anchor="ctr" anchorCtr="0">
+          <a:noAutofit/>
+        </a:bodyPr>
+        <a:lstStyle/>
+        <a:p>
+          <a:pPr marL="0" lvl="0" indent="0" algn="l" defTabSz="755650">
+            <a:lnSpc>
+              <a:spcPct val="90000"/>
+            </a:lnSpc>
+            <a:spcBef>
+              <a:spcPct val="0"/>
+            </a:spcBef>
+            <a:spcAft>
+              <a:spcPct val="35000"/>
+            </a:spcAft>
+            <a:buNone/>
+          </a:pPr>
+          <a:r>
+            <a:rPr lang="fr-FR" sz="1700" kern="1200"/>
+            <a:t>Tarifs TRES variables</a:t>
+          </a:r>
+          <a:endParaRPr lang="en-US" sz="1700" kern="1200"/>
+        </a:p>
+      </dsp:txBody>
+      <dsp:txXfrm>
+        <a:off x="5691276" y="819090"/>
+        <a:ext cx="3074774" cy="1512168"/>
+      </dsp:txXfrm>
+    </dsp:sp>
+    <dsp:sp modelId="{075EBBA1-E8F9-4A57-B94F-1C4017C2CC7A}">
+      <dsp:nvSpPr>
+        <dsp:cNvPr id="0" name=""/>
+        <dsp:cNvSpPr/>
+      </dsp:nvSpPr>
+      <dsp:spPr>
+        <a:xfrm>
+          <a:off x="0" y="2709301"/>
+          <a:ext cx="8766051" cy="1512168"/>
+        </a:xfrm>
+        <a:prstGeom prst="roundRect">
+          <a:avLst>
+            <a:gd name="adj" fmla="val 10000"/>
+          </a:avLst>
+        </a:prstGeom>
+        <a:solidFill>
+          <a:schemeClr val="accent2">
+            <a:tint val="40000"/>
+            <a:hueOff val="0"/>
+            <a:satOff val="0"/>
+            <a:lumOff val="0"/>
+            <a:alphaOff val="0"/>
+          </a:schemeClr>
+        </a:solidFill>
+        <a:ln>
+          <a:noFill/>
+        </a:ln>
+        <a:effectLst/>
+      </dsp:spPr>
+      <dsp:style>
+        <a:lnRef idx="0">
+          <a:scrgbClr r="0" g="0" b="0"/>
+        </a:lnRef>
+        <a:fillRef idx="1">
+          <a:scrgbClr r="0" g="0" b="0"/>
+        </a:fillRef>
+        <a:effectRef idx="0">
+          <a:scrgbClr r="0" g="0" b="0"/>
+        </a:effectRef>
+        <a:fontRef idx="minor"/>
+      </dsp:style>
+    </dsp:sp>
+    <dsp:sp modelId="{BDB17737-BBC0-40FF-A2FB-BBCA3105D3D7}">
+      <dsp:nvSpPr>
+        <dsp:cNvPr id="0" name=""/>
+        <dsp:cNvSpPr/>
+      </dsp:nvSpPr>
+      <dsp:spPr>
+        <a:xfrm>
+          <a:off x="457430" y="3049538"/>
+          <a:ext cx="831692" cy="831692"/>
+        </a:xfrm>
+        <a:prstGeom prst="rect">
+          <a:avLst/>
+        </a:prstGeom>
+        <a:blipFill>
+          <a:blip xmlns:r="http://schemas.openxmlformats.org/officeDocument/2006/relationships" r:embed="rId3">
+            <a:extLst>
+              <a:ext uri="{28A0092B-C50C-407E-A947-70E740481C1C}">
+                <a14:useLocalDpi xmlns:a14="http://schemas.microsoft.com/office/drawing/2010/main" val="0"/>
+              </a:ext>
+              <a:ext uri="{96DAC541-7B7A-43D3-8B79-37D633B846F1}">
+                <asvg:svgBlip xmlns:asvg="http://schemas.microsoft.com/office/drawing/2016/SVG/main" r:embed="rId4"/>
+              </a:ext>
+            </a:extLst>
+          </a:blip>
+          <a:stretch>
+            <a:fillRect/>
+          </a:stretch>
+        </a:blipFill>
+        <a:ln w="25400" cap="flat" cmpd="sng" algn="ctr">
+          <a:noFill/>
+          <a:prstDash val="solid"/>
+        </a:ln>
+        <a:effectLst/>
+      </dsp:spPr>
+      <dsp:style>
+        <a:lnRef idx="2">
+          <a:scrgbClr r="0" g="0" b="0"/>
+        </a:lnRef>
+        <a:fillRef idx="1">
+          <a:scrgbClr r="0" g="0" b="0"/>
+        </a:fillRef>
+        <a:effectRef idx="0">
+          <a:scrgbClr r="0" g="0" b="0"/>
+        </a:effectRef>
+        <a:fontRef idx="minor">
+          <a:schemeClr val="lt1"/>
+        </a:fontRef>
+      </dsp:style>
+    </dsp:sp>
+    <dsp:sp modelId="{781E368C-A4D5-4009-B21E-8273F3D733EB}">
+      <dsp:nvSpPr>
+        <dsp:cNvPr id="0" name=""/>
+        <dsp:cNvSpPr/>
+      </dsp:nvSpPr>
+      <dsp:spPr>
+        <a:xfrm>
+          <a:off x="1746554" y="2709301"/>
+          <a:ext cx="3944722" cy="1512168"/>
+        </a:xfrm>
+        <a:prstGeom prst="rect">
+          <a:avLst/>
+        </a:prstGeom>
+        <a:noFill/>
+        <a:ln>
+          <a:noFill/>
+        </a:ln>
+        <a:effectLst/>
+      </dsp:spPr>
+      <dsp:style>
+        <a:lnRef idx="0">
+          <a:scrgbClr r="0" g="0" b="0"/>
+        </a:lnRef>
+        <a:fillRef idx="0">
+          <a:scrgbClr r="0" g="0" b="0"/>
+        </a:fillRef>
+        <a:effectRef idx="0">
+          <a:scrgbClr r="0" g="0" b="0"/>
+        </a:effectRef>
+        <a:fontRef idx="minor"/>
+      </dsp:style>
+      <dsp:txBody>
+        <a:bodyPr spcFirstLastPara="0" vert="horz" wrap="square" lIns="160038" tIns="160038" rIns="160038" bIns="160038" numCol="1" spcCol="1270" anchor="ctr" anchorCtr="0">
+          <a:noAutofit/>
+        </a:bodyPr>
+        <a:lstStyle/>
+        <a:p>
+          <a:pPr marL="0" lvl="0" indent="0" algn="l" defTabSz="977900">
+            <a:lnSpc>
+              <a:spcPct val="90000"/>
+            </a:lnSpc>
+            <a:spcBef>
+              <a:spcPct val="0"/>
+            </a:spcBef>
+            <a:spcAft>
+              <a:spcPct val="35000"/>
+            </a:spcAft>
+            <a:buNone/>
+          </a:pPr>
+          <a:r>
+            <a:rPr lang="fr-FR" sz="2200" kern="1200"/>
+            <a:t>Les fournisseurs de clouds classiques proposent des SaaS et PaaS des LLM open sources</a:t>
+          </a:r>
+          <a:endParaRPr lang="en-US" sz="2200" kern="1200"/>
+        </a:p>
+      </dsp:txBody>
+      <dsp:txXfrm>
+        <a:off x="1746554" y="2709301"/>
+        <a:ext cx="3944722" cy="1512168"/>
+      </dsp:txXfrm>
+    </dsp:sp>
+    <dsp:sp modelId="{A4C6D6CB-D74A-428C-879F-53818722A8C4}">
+      <dsp:nvSpPr>
+        <dsp:cNvPr id="0" name=""/>
+        <dsp:cNvSpPr/>
+      </dsp:nvSpPr>
+      <dsp:spPr>
+        <a:xfrm>
+          <a:off x="5691276" y="2709301"/>
+          <a:ext cx="3074774" cy="1512168"/>
+        </a:xfrm>
+        <a:prstGeom prst="rect">
+          <a:avLst/>
+        </a:prstGeom>
+        <a:noFill/>
+        <a:ln>
+          <a:noFill/>
+        </a:ln>
+        <a:effectLst/>
+      </dsp:spPr>
+      <dsp:style>
+        <a:lnRef idx="0">
+          <a:scrgbClr r="0" g="0" b="0"/>
+        </a:lnRef>
+        <a:fillRef idx="0">
+          <a:scrgbClr r="0" g="0" b="0"/>
+        </a:fillRef>
+        <a:effectRef idx="0">
+          <a:scrgbClr r="0" g="0" b="0"/>
+        </a:effectRef>
+        <a:fontRef idx="minor"/>
+      </dsp:style>
+      <dsp:txBody>
+        <a:bodyPr spcFirstLastPara="0" vert="horz" wrap="square" lIns="160038" tIns="160038" rIns="160038" bIns="160038" numCol="1" spcCol="1270" anchor="ctr" anchorCtr="0">
+          <a:noAutofit/>
+        </a:bodyPr>
+        <a:lstStyle/>
+        <a:p>
+          <a:pPr marL="0" lvl="0" indent="0" algn="l" defTabSz="755650">
+            <a:lnSpc>
+              <a:spcPct val="90000"/>
+            </a:lnSpc>
+            <a:spcBef>
+              <a:spcPct val="0"/>
+            </a:spcBef>
+            <a:spcAft>
+              <a:spcPct val="35000"/>
+            </a:spcAft>
+            <a:buNone/>
+          </a:pPr>
+          <a:r>
+            <a:rPr lang="fr-FR" sz="1700" kern="1200"/>
+            <a:t>AWS</a:t>
+          </a:r>
+          <a:endParaRPr lang="en-US" sz="1700" kern="1200"/>
+        </a:p>
+        <a:p>
+          <a:pPr marL="0" lvl="0" indent="0" algn="l" defTabSz="755650">
+            <a:lnSpc>
+              <a:spcPct val="90000"/>
+            </a:lnSpc>
+            <a:spcBef>
+              <a:spcPct val="0"/>
+            </a:spcBef>
+            <a:spcAft>
+              <a:spcPct val="35000"/>
+            </a:spcAft>
+            <a:buNone/>
+          </a:pPr>
+          <a:r>
+            <a:rPr lang="fr-FR" sz="1700" kern="1200"/>
+            <a:t>GCP</a:t>
+          </a:r>
+          <a:endParaRPr lang="en-US" sz="1700" kern="1200"/>
+        </a:p>
+        <a:p>
+          <a:pPr marL="0" lvl="0" indent="0" algn="l" defTabSz="755650">
+            <a:lnSpc>
+              <a:spcPct val="90000"/>
+            </a:lnSpc>
+            <a:spcBef>
+              <a:spcPct val="0"/>
+            </a:spcBef>
+            <a:spcAft>
+              <a:spcPct val="35000"/>
+            </a:spcAft>
+            <a:buNone/>
+          </a:pPr>
+          <a:r>
+            <a:rPr lang="fr-FR" sz="1700" kern="1200"/>
+            <a:t>Azure</a:t>
+          </a:r>
+          <a:endParaRPr lang="en-US" sz="1700" kern="1200"/>
+        </a:p>
+      </dsp:txBody>
+      <dsp:txXfrm>
+        <a:off x="5691276" y="2709301"/>
+        <a:ext cx="3074774" cy="1512168"/>
+      </dsp:txXfrm>
+    </dsp:sp>
+  </dsp:spTree>
+</dsp:drawing>
+</file>
+
 <file path=ppt/diagrams/layout1.xml><?xml version="1.0" encoding="utf-8"?>
 <dgm:layoutDef xmlns:dgm="http://schemas.openxmlformats.org/drawingml/2006/diagram" xmlns:a="http://schemas.openxmlformats.org/drawingml/2006/main" uniqueId="urn:microsoft.com/office/officeart/2005/8/layout/list1">
   <dgm:title val=""/>
@@ -6977,6 +8601,300 @@
 </dgm:layoutDef>
 </file>
 
+<file path=ppt/diagrams/layout4.xml><?xml version="1.0" encoding="utf-8"?>
+<dgm:layoutDef xmlns:dgm="http://schemas.openxmlformats.org/drawingml/2006/diagram" xmlns:a="http://schemas.openxmlformats.org/drawingml/2006/main" uniqueId="urn:microsoft.com/office/officeart/2018/2/layout/IconVerticalSolidList">
+  <dgm:title val="Icon Vertical Solid List"/>
+  <dgm:desc val="Use to show a series of visuals from top to bottom with Level 1 or Level 1 and Level 2 text grouped in a shape. Works best with icons or small pictures with lengthier descriptions."/>
+  <dgm:catLst>
+    <dgm:cat type="icon" pri="500"/>
+  </dgm:catLst>
+  <dgm:sampData useDef="1">
+    <dgm:dataModel>
+      <dgm:ptLst/>
+      <dgm:bg/>
+      <dgm:whole/>
+    </dgm:dataModel>
+  </dgm:sampData>
+  <dgm:styleData useDef="1">
+    <dgm:dataModel>
+      <dgm:ptLst/>
+      <dgm:bg/>
+      <dgm:whole/>
+    </dgm:dataModel>
+  </dgm:styleData>
+  <dgm:clrData useDef="1">
+    <dgm:dataModel>
+      <dgm:ptLst/>
+      <dgm:bg/>
+      <dgm:whole/>
+    </dgm:dataModel>
+  </dgm:clrData>
+  <dgm:layoutNode name="root">
+    <dgm:varLst>
+      <dgm:dir/>
+      <dgm:resizeHandles val="exact"/>
+    </dgm:varLst>
+    <dgm:choose name="Name0">
+      <dgm:if name="Name1" axis="self" func="var" arg="dir" op="equ" val="norm">
+        <dgm:alg type="lin">
+          <dgm:param type="linDir" val="fromT"/>
+          <dgm:param type="nodeHorzAlign" val="l"/>
+        </dgm:alg>
+      </dgm:if>
+      <dgm:else name="Name2">
+        <dgm:alg type="lin">
+          <dgm:param type="linDir" val="fromT"/>
+          <dgm:param type="nodeHorzAlign" val="r"/>
+        </dgm:alg>
+      </dgm:else>
+    </dgm:choose>
+    <dgm:shape xmlns:r="http://schemas.openxmlformats.org/officeDocument/2006/relationships" r:blip="">
+      <dgm:adjLst/>
+    </dgm:shape>
+    <dgm:presOf/>
+    <dgm:choose name="Name3">
+      <dgm:if name="Name4" axis="ch" ptType="node" func="cnt" op="lte" val="3">
+        <dgm:constrLst>
+          <dgm:constr type="h" for="ch" forName="compNode" refType="h" fact="0.3"/>
+          <dgm:constr type="w" for="ch" forName="compNode" refType="w"/>
+          <dgm:constr type="h" for="ch" forName="sibTrans" refType="h" refFor="ch" refForName="compNode" fact="0.25"/>
+          <dgm:constr type="primFontSz" for="des" forName="parTx" val="25"/>
+          <dgm:constr type="primFontSz" for="des" forName="desTx" refType="primFontSz" refFor="des" refForName="parTx" op="lte" fact="0.75"/>
+          <dgm:constr type="h" for="des" forName="compNode" op="equ"/>
+          <dgm:constr type="h" for="des" forName="bgRect" op="equ"/>
+          <dgm:constr type="h" for="des" forName="iconRect" op="equ"/>
+          <dgm:constr type="w" for="des" forName="iconRect" op="equ"/>
+          <dgm:constr type="h" for="des" forName="spaceRect" op="equ"/>
+          <dgm:constr type="h" for="des" forName="parTx" op="equ"/>
+          <dgm:constr type="h" for="des" forName="desTx" op="equ"/>
+        </dgm:constrLst>
+      </dgm:if>
+      <dgm:if name="Name5" axis="ch" ptType="node" func="cnt" op="lte" val="4">
+        <dgm:constrLst>
+          <dgm:constr type="h" for="ch" forName="compNode" refType="h" fact="0.3"/>
+          <dgm:constr type="w" for="ch" forName="compNode" refType="w"/>
+          <dgm:constr type="h" for="ch" forName="sibTrans" refType="h" refFor="ch" refForName="compNode" fact="0.25"/>
+          <dgm:constr type="primFontSz" for="des" forName="parTx" val="22"/>
+          <dgm:constr type="primFontSz" for="des" forName="desTx" refType="primFontSz" refFor="des" refForName="parTx" op="lte" fact="0.75"/>
+          <dgm:constr type="h" for="des" forName="compNode" op="equ"/>
+          <dgm:constr type="h" for="des" forName="bgRect" op="equ"/>
+          <dgm:constr type="h" for="des" forName="iconRect" op="equ"/>
+          <dgm:constr type="w" for="des" forName="iconRect" op="equ"/>
+          <dgm:constr type="h" for="des" forName="spaceRect" op="equ"/>
+          <dgm:constr type="h" for="des" forName="parTx" op="equ"/>
+          <dgm:constr type="h" for="des" forName="desTx" op="equ"/>
+        </dgm:constrLst>
+      </dgm:if>
+      <dgm:if name="Name6" axis="ch" ptType="node" func="cnt" op="lte" val="6">
+        <dgm:constrLst>
+          <dgm:constr type="h" for="ch" forName="compNode" refType="h" fact="0.3"/>
+          <dgm:constr type="w" for="ch" forName="compNode" refType="w"/>
+          <dgm:constr type="h" for="ch" forName="sibTrans" refType="h" refFor="ch" refForName="compNode" fact="0.25"/>
+          <dgm:constr type="primFontSz" for="des" forName="parTx" val="19"/>
+          <dgm:constr type="primFontSz" for="des" forName="desTx" refType="primFontSz" refFor="des" refForName="parTx" op="lte" fact="0.75"/>
+          <dgm:constr type="h" for="des" forName="compNode" op="equ"/>
+          <dgm:constr type="h" for="des" forName="bgRect" op="equ"/>
+          <dgm:constr type="h" for="des" forName="iconRect" op="equ"/>
+          <dgm:constr type="w" for="des" forName="iconRect" op="equ"/>
+          <dgm:constr type="h" for="des" forName="spaceRect" op="equ"/>
+          <dgm:constr type="h" for="des" forName="parTx" op="equ"/>
+          <dgm:constr type="h" for="des" forName="desTx" op="equ"/>
+        </dgm:constrLst>
+      </dgm:if>
+      <dgm:else name="Name7">
+        <dgm:constrLst>
+          <dgm:constr type="h" for="ch" forName="compNode" refType="h" fact="0.3"/>
+          <dgm:constr type="w" for="ch" forName="compNode" refType="w"/>
+          <dgm:constr type="h" for="ch" forName="sibTrans" refType="h" refFor="ch" refForName="compNode" fact="0.25"/>
+          <dgm:constr type="primFontSz" for="des" forName="parTx" val="16"/>
+          <dgm:constr type="primFontSz" for="des" forName="desTx" refType="primFontSz" refFor="des" refForName="parTx" op="lte" fact="0.75"/>
+          <dgm:constr type="h" for="des" forName="compNode" op="equ"/>
+          <dgm:constr type="h" for="des" forName="bgRect" op="equ"/>
+          <dgm:constr type="h" for="des" forName="iconRect" op="equ"/>
+          <dgm:constr type="w" for="des" forName="iconRect" op="equ"/>
+          <dgm:constr type="h" for="des" forName="spaceRect" op="equ"/>
+          <dgm:constr type="h" for="des" forName="parTx" op="equ"/>
+          <dgm:constr type="h" for="des" forName="desTx" op="equ"/>
+        </dgm:constrLst>
+      </dgm:else>
+    </dgm:choose>
+    <dgm:ruleLst>
+      <dgm:rule type="h" for="ch" forName="compNode" val="0" fact="NaN" max="NaN"/>
+    </dgm:ruleLst>
+    <dgm:forEach name="Name8" axis="ch" ptType="node">
+      <dgm:layoutNode name="compNode">
+        <dgm:alg type="composite"/>
+        <dgm:shape xmlns:r="http://schemas.openxmlformats.org/officeDocument/2006/relationships" r:blip="">
+          <dgm:adjLst/>
+        </dgm:shape>
+        <dgm:presOf axis="self"/>
+        <dgm:choose name="Name9">
+          <dgm:if name="Name10" axis="ch" ptType="node" func="cnt" op="gte" val="1">
+            <dgm:constrLst>
+              <dgm:constr type="w" for="ch" forName="bgRect" refType="w"/>
+              <dgm:constr type="h" for="ch" forName="bgRect" refType="h"/>
+              <dgm:constr type="l" for="ch" forName="bgRect"/>
+              <dgm:constr type="t" for="ch" forName="bgRect"/>
+              <dgm:constr type="h" for="ch" forName="iconRect" refType="h" fact="0.55"/>
+              <dgm:constr type="w" for="ch" forName="iconRect" refType="h" refFor="ch" refForName="iconRect"/>
+              <dgm:constr type="l" for="ch" forName="iconRect" refType="h" refFor="ch" refForName="iconRect" fact="0.55"/>
+              <dgm:constr type="ctrY" for="ch" forName="iconRect" refType="ctrY" refFor="ch" refForName="bgRect"/>
+              <dgm:constr type="w" for="ch" forName="spaceRect" refType="l" refFor="ch" refForName="iconRect"/>
+              <dgm:constr type="h" for="ch" forName="spaceRect" refType="h"/>
+              <dgm:constr type="l" for="ch" forName="spaceRect" refType="r" refFor="ch" refForName="iconRect"/>
+              <dgm:constr type="t" for="ch" forName="spaceRect"/>
+              <dgm:constr type="w" for="ch" forName="parTx" refType="w" fact="0.45"/>
+              <dgm:constr type="h" for="ch" forName="parTx" refType="h"/>
+              <dgm:constr type="l" for="ch" forName="parTx" refType="r" refFor="ch" refForName="spaceRect"/>
+              <dgm:constr type="t" for="ch" forName="parTx"/>
+              <dgm:constr type="h" for="ch" forName="desTx" refType="h"/>
+              <dgm:constr type="l" for="ch" forName="desTx" refType="r" refFor="ch" refForName="parTx"/>
+              <dgm:constr type="t" for="ch" forName="desTx"/>
+            </dgm:constrLst>
+          </dgm:if>
+          <dgm:else name="Name11">
+            <dgm:constrLst>
+              <dgm:constr type="w" for="ch" forName="bgRect" refType="w"/>
+              <dgm:constr type="h" for="ch" forName="bgRect" refType="h"/>
+              <dgm:constr type="l" for="ch" forName="bgRect"/>
+              <dgm:constr type="t" for="ch" forName="bgRect"/>
+              <dgm:constr type="h" for="ch" forName="iconRect" refType="h" fact="0.55"/>
+              <dgm:constr type="w" for="ch" forName="iconRect" refType="h" refFor="ch" refForName="iconRect"/>
+              <dgm:constr type="l" for="ch" forName="iconRect" refType="h" refFor="ch" refForName="iconRect" fact="0.55"/>
+              <dgm:constr type="ctrY" for="ch" forName="iconRect" refType="ctrY" refFor="ch" refForName="bgRect"/>
+              <dgm:constr type="w" for="ch" forName="spaceRect" refType="l" refFor="ch" refForName="iconRect"/>
+              <dgm:constr type="h" for="ch" forName="spaceRect" refType="h"/>
+              <dgm:constr type="l" for="ch" forName="spaceRect" refType="r" refFor="ch" refForName="iconRect"/>
+              <dgm:constr type="t" for="ch" forName="spaceRect"/>
+              <dgm:constr type="h" for="ch" forName="parTx" refType="h"/>
+              <dgm:constr type="l" for="ch" forName="parTx" refType="r" refFor="ch" refForName="spaceRect"/>
+              <dgm:constr type="t" for="ch" forName="parTx"/>
+            </dgm:constrLst>
+          </dgm:else>
+        </dgm:choose>
+        <dgm:ruleLst>
+          <dgm:rule type="h" val="INF" fact="NaN" max="NaN"/>
+        </dgm:ruleLst>
+        <dgm:layoutNode name="bgRect" styleLbl="bgShp">
+          <dgm:alg type="sp"/>
+          <dgm:shape xmlns:r="http://schemas.openxmlformats.org/officeDocument/2006/relationships" type="roundRect" r:blip="">
+            <dgm:adjLst>
+              <dgm:adj idx="1" val="0.1"/>
+            </dgm:adjLst>
+          </dgm:shape>
+          <dgm:presOf/>
+          <dgm:constrLst/>
+          <dgm:ruleLst/>
+        </dgm:layoutNode>
+        <dgm:layoutNode name="iconRect" styleLbl="node1">
+          <dgm:alg type="sp"/>
+          <dgm:shape xmlns:r="http://schemas.openxmlformats.org/officeDocument/2006/relationships" type="rect" r:blip="" blipPhldr="1">
+            <dgm:adjLst/>
+          </dgm:shape>
+          <dgm:presOf/>
+          <dgm:constrLst/>
+          <dgm:ruleLst/>
+        </dgm:layoutNode>
+        <dgm:layoutNode name="spaceRect">
+          <dgm:alg type="sp"/>
+          <dgm:shape xmlns:r="http://schemas.openxmlformats.org/officeDocument/2006/relationships" r:blip="">
+            <dgm:adjLst/>
+          </dgm:shape>
+          <dgm:presOf/>
+          <dgm:constrLst/>
+          <dgm:ruleLst/>
+        </dgm:layoutNode>
+        <dgm:layoutNode name="parTx" styleLbl="revTx">
+          <dgm:varLst>
+            <dgm:chMax val="0"/>
+            <dgm:chPref val="0"/>
+          </dgm:varLst>
+          <dgm:alg type="tx">
+            <dgm:param type="txAnchorVert" val="mid"/>
+            <dgm:param type="parTxLTRAlign" val="l"/>
+            <dgm:param type="shpTxLTRAlignCh" val="l"/>
+            <dgm:param type="parTxRTLAlign" val="r"/>
+            <dgm:param type="shpTxRTLAlignCh" val="r"/>
+          </dgm:alg>
+          <dgm:shape xmlns:r="http://schemas.openxmlformats.org/officeDocument/2006/relationships" type="rect" r:blip="">
+            <dgm:adjLst/>
+          </dgm:shape>
+          <dgm:presOf axis="self" ptType="node"/>
+          <dgm:constrLst>
+            <dgm:constr type="lMarg" refType="h" fact="0.3"/>
+            <dgm:constr type="rMarg" refType="h" fact="0.3"/>
+            <dgm:constr type="tMarg" refType="h" fact="0.3"/>
+            <dgm:constr type="bMarg" refType="h" fact="0.3"/>
+          </dgm:constrLst>
+          <dgm:ruleLst>
+            <dgm:rule type="primFontSz" val="14" fact="NaN" max="NaN"/>
+            <dgm:rule type="h" val="INF" fact="NaN" max="NaN"/>
+          </dgm:ruleLst>
+        </dgm:layoutNode>
+        <dgm:choose name="Name12">
+          <dgm:if name="Name13" axis="ch" ptType="node" func="cnt" op="gte" val="1">
+            <dgm:layoutNode name="desTx" styleLbl="revTx">
+              <dgm:varLst/>
+              <dgm:alg type="tx">
+                <dgm:param type="txAnchorVertCh" val="mid"/>
+                <dgm:param type="parTxLTRAlign" val="l"/>
+                <dgm:param type="shpTxLTRAlignCh" val="l"/>
+                <dgm:param type="parTxRTLAlign" val="r"/>
+                <dgm:param type="shpTxRTLAlignCh" val="r"/>
+                <dgm:param type="stBulletLvl" val="0"/>
+              </dgm:alg>
+              <dgm:shape xmlns:r="http://schemas.openxmlformats.org/officeDocument/2006/relationships" type="rect" r:blip="">
+                <dgm:adjLst/>
+              </dgm:shape>
+              <dgm:presOf axis="des" ptType="node"/>
+              <dgm:constrLst>
+                <dgm:constr type="primFontSz" val="18"/>
+                <dgm:constr type="secFontSz" refType="primFontSz"/>
+                <dgm:constr type="lMarg" refType="h" fact="0.3"/>
+                <dgm:constr type="rMarg" refType="h" fact="0.3"/>
+                <dgm:constr type="tMarg" refType="h" fact="0.3"/>
+                <dgm:constr type="bMarg" refType="h" fact="0.3"/>
+              </dgm:constrLst>
+              <dgm:ruleLst>
+                <dgm:rule type="primFontSz" val="11" fact="NaN" max="NaN"/>
+              </dgm:ruleLst>
+            </dgm:layoutNode>
+          </dgm:if>
+          <dgm:else name="Name14"/>
+        </dgm:choose>
+      </dgm:layoutNode>
+      <dgm:forEach name="Name15" axis="followSib" ptType="sibTrans" cnt="1">
+        <dgm:layoutNode name="sibTrans">
+          <dgm:alg type="sp"/>
+          <dgm:shape xmlns:r="http://schemas.openxmlformats.org/officeDocument/2006/relationships" r:blip="">
+            <dgm:adjLst/>
+          </dgm:shape>
+          <dgm:presOf axis="self"/>
+          <dgm:constrLst/>
+          <dgm:ruleLst/>
+        </dgm:layoutNode>
+      </dgm:forEach>
+    </dgm:forEach>
+  </dgm:layoutNode>
+  <dgm:extLst>
+    <a:ext uri="{68A01E43-0DF5-4B5B-8FA6-DAF915123BFB}">
+      <dgm1612:lstStyle xmlns:dgm1612="http://schemas.microsoft.com/office/drawing/2016/12/diagram">
+        <a:lvl1pPr>
+          <a:lnSpc>
+            <a:spcPct val="100000"/>
+          </a:lnSpc>
+        </a:lvl1pPr>
+        <a:lvl2pPr>
+          <a:lnSpc>
+            <a:spcPct val="100000"/>
+          </a:lnSpc>
+        </a:lvl2pPr>
+      </dgm1612:lstStyle>
+    </a:ext>
+  </dgm:extLst>
+</dgm:layoutDef>
+</file>
+
 <file path=ppt/diagrams/quickStyle1.xml><?xml version="1.0" encoding="utf-8"?>
 <dgm:styleDef xmlns:dgm="http://schemas.openxmlformats.org/drawingml/2006/diagram" xmlns:a="http://schemas.openxmlformats.org/drawingml/2006/main" uniqueId="urn:microsoft.com/office/officeart/2005/8/quickstyle/simple4">
   <dgm:title val=""/>
@@ -10051,6 +11969,1040 @@
         <a:scrgbClr r="0" g="0" b="0"/>
       </a:fillRef>
       <a:effectRef idx="2">
+        <a:scrgbClr r="0" g="0" b="0"/>
+      </a:effectRef>
+      <a:fontRef idx="minor"/>
+    </dgm:style>
+  </dgm:styleLbl>
+  <dgm:styleLbl name="revTx">
+    <dgm:scene3d>
+      <a:camera prst="orthographicFront"/>
+      <a:lightRig rig="threePt" dir="t"/>
+    </dgm:scene3d>
+    <dgm:sp3d/>
+    <dgm:txPr/>
+    <dgm:style>
+      <a:lnRef idx="0">
+        <a:scrgbClr r="0" g="0" b="0"/>
+      </a:lnRef>
+      <a:fillRef idx="0">
+        <a:scrgbClr r="0" g="0" b="0"/>
+      </a:fillRef>
+      <a:effectRef idx="0">
+        <a:scrgbClr r="0" g="0" b="0"/>
+      </a:effectRef>
+      <a:fontRef idx="minor"/>
+    </dgm:style>
+  </dgm:styleLbl>
+</dgm:styleDef>
+</file>
+
+<file path=ppt/diagrams/quickStyle4.xml><?xml version="1.0" encoding="utf-8"?>
+<dgm:styleDef xmlns:dgm="http://schemas.openxmlformats.org/drawingml/2006/diagram" xmlns:a="http://schemas.openxmlformats.org/drawingml/2006/main" uniqueId="urn:microsoft.com/office/officeart/2005/8/quickstyle/simple1">
+  <dgm:title val=""/>
+  <dgm:desc val=""/>
+  <dgm:catLst>
+    <dgm:cat type="simple" pri="10100"/>
+  </dgm:catLst>
+  <dgm:scene3d>
+    <a:camera prst="orthographicFront"/>
+    <a:lightRig rig="threePt" dir="t"/>
+  </dgm:scene3d>
+  <dgm:styleLbl name="node0">
+    <dgm:scene3d>
+      <a:camera prst="orthographicFront"/>
+      <a:lightRig rig="threePt" dir="t"/>
+    </dgm:scene3d>
+    <dgm:sp3d/>
+    <dgm:txPr/>
+    <dgm:style>
+      <a:lnRef idx="2">
+        <a:scrgbClr r="0" g="0" b="0"/>
+      </a:lnRef>
+      <a:fillRef idx="1">
+        <a:scrgbClr r="0" g="0" b="0"/>
+      </a:fillRef>
+      <a:effectRef idx="0">
+        <a:scrgbClr r="0" g="0" b="0"/>
+      </a:effectRef>
+      <a:fontRef idx="minor">
+        <a:schemeClr val="lt1"/>
+      </a:fontRef>
+    </dgm:style>
+  </dgm:styleLbl>
+  <dgm:styleLbl name="lnNode1">
+    <dgm:scene3d>
+      <a:camera prst="orthographicFront"/>
+      <a:lightRig rig="threePt" dir="t"/>
+    </dgm:scene3d>
+    <dgm:sp3d/>
+    <dgm:txPr/>
+    <dgm:style>
+      <a:lnRef idx="2">
+        <a:scrgbClr r="0" g="0" b="0"/>
+      </a:lnRef>
+      <a:fillRef idx="1">
+        <a:scrgbClr r="0" g="0" b="0"/>
+      </a:fillRef>
+      <a:effectRef idx="0">
+        <a:scrgbClr r="0" g="0" b="0"/>
+      </a:effectRef>
+      <a:fontRef idx="minor">
+        <a:schemeClr val="lt1"/>
+      </a:fontRef>
+    </dgm:style>
+  </dgm:styleLbl>
+  <dgm:styleLbl name="vennNode1">
+    <dgm:scene3d>
+      <a:camera prst="orthographicFront"/>
+      <a:lightRig rig="threePt" dir="t"/>
+    </dgm:scene3d>
+    <dgm:sp3d/>
+    <dgm:txPr/>
+    <dgm:style>
+      <a:lnRef idx="2">
+        <a:scrgbClr r="0" g="0" b="0"/>
+      </a:lnRef>
+      <a:fillRef idx="1">
+        <a:scrgbClr r="0" g="0" b="0"/>
+      </a:fillRef>
+      <a:effectRef idx="0">
+        <a:scrgbClr r="0" g="0" b="0"/>
+      </a:effectRef>
+      <a:fontRef idx="minor">
+        <a:schemeClr val="tx1"/>
+      </a:fontRef>
+    </dgm:style>
+  </dgm:styleLbl>
+  <dgm:styleLbl name="alignNode1">
+    <dgm:scene3d>
+      <a:camera prst="orthographicFront"/>
+      <a:lightRig rig="threePt" dir="t"/>
+    </dgm:scene3d>
+    <dgm:sp3d/>
+    <dgm:txPr/>
+    <dgm:style>
+      <a:lnRef idx="2">
+        <a:scrgbClr r="0" g="0" b="0"/>
+      </a:lnRef>
+      <a:fillRef idx="1">
+        <a:scrgbClr r="0" g="0" b="0"/>
+      </a:fillRef>
+      <a:effectRef idx="0">
+        <a:scrgbClr r="0" g="0" b="0"/>
+      </a:effectRef>
+      <a:fontRef idx="minor">
+        <a:schemeClr val="lt1"/>
+      </a:fontRef>
+    </dgm:style>
+  </dgm:styleLbl>
+  <dgm:styleLbl name="node1">
+    <dgm:scene3d>
+      <a:camera prst="orthographicFront"/>
+      <a:lightRig rig="threePt" dir="t"/>
+    </dgm:scene3d>
+    <dgm:sp3d/>
+    <dgm:txPr/>
+    <dgm:style>
+      <a:lnRef idx="2">
+        <a:scrgbClr r="0" g="0" b="0"/>
+      </a:lnRef>
+      <a:fillRef idx="1">
+        <a:scrgbClr r="0" g="0" b="0"/>
+      </a:fillRef>
+      <a:effectRef idx="0">
+        <a:scrgbClr r="0" g="0" b="0"/>
+      </a:effectRef>
+      <a:fontRef idx="minor">
+        <a:schemeClr val="lt1"/>
+      </a:fontRef>
+    </dgm:style>
+  </dgm:styleLbl>
+  <dgm:styleLbl name="node2">
+    <dgm:scene3d>
+      <a:camera prst="orthographicFront"/>
+      <a:lightRig rig="threePt" dir="t"/>
+    </dgm:scene3d>
+    <dgm:sp3d/>
+    <dgm:txPr/>
+    <dgm:style>
+      <a:lnRef idx="2">
+        <a:scrgbClr r="0" g="0" b="0"/>
+      </a:lnRef>
+      <a:fillRef idx="1">
+        <a:scrgbClr r="0" g="0" b="0"/>
+      </a:fillRef>
+      <a:effectRef idx="0">
+        <a:scrgbClr r="0" g="0" b="0"/>
+      </a:effectRef>
+      <a:fontRef idx="minor">
+        <a:schemeClr val="lt1"/>
+      </a:fontRef>
+    </dgm:style>
+  </dgm:styleLbl>
+  <dgm:styleLbl name="node3">
+    <dgm:scene3d>
+      <a:camera prst="orthographicFront"/>
+      <a:lightRig rig="threePt" dir="t"/>
+    </dgm:scene3d>
+    <dgm:sp3d/>
+    <dgm:txPr/>
+    <dgm:style>
+      <a:lnRef idx="2">
+        <a:scrgbClr r="0" g="0" b="0"/>
+      </a:lnRef>
+      <a:fillRef idx="1">
+        <a:scrgbClr r="0" g="0" b="0"/>
+      </a:fillRef>
+      <a:effectRef idx="0">
+        <a:scrgbClr r="0" g="0" b="0"/>
+      </a:effectRef>
+      <a:fontRef idx="minor">
+        <a:schemeClr val="lt1"/>
+      </a:fontRef>
+    </dgm:style>
+  </dgm:styleLbl>
+  <dgm:styleLbl name="node4">
+    <dgm:scene3d>
+      <a:camera prst="orthographicFront"/>
+      <a:lightRig rig="threePt" dir="t"/>
+    </dgm:scene3d>
+    <dgm:sp3d/>
+    <dgm:txPr/>
+    <dgm:style>
+      <a:lnRef idx="2">
+        <a:scrgbClr r="0" g="0" b="0"/>
+      </a:lnRef>
+      <a:fillRef idx="1">
+        <a:scrgbClr r="0" g="0" b="0"/>
+      </a:fillRef>
+      <a:effectRef idx="0">
+        <a:scrgbClr r="0" g="0" b="0"/>
+      </a:effectRef>
+      <a:fontRef idx="minor">
+        <a:schemeClr val="lt1"/>
+      </a:fontRef>
+    </dgm:style>
+  </dgm:styleLbl>
+  <dgm:styleLbl name="fgImgPlace1">
+    <dgm:scene3d>
+      <a:camera prst="orthographicFront"/>
+      <a:lightRig rig="threePt" dir="t"/>
+    </dgm:scene3d>
+    <dgm:sp3d/>
+    <dgm:txPr/>
+    <dgm:style>
+      <a:lnRef idx="2">
+        <a:scrgbClr r="0" g="0" b="0"/>
+      </a:lnRef>
+      <a:fillRef idx="1">
+        <a:scrgbClr r="0" g="0" b="0"/>
+      </a:fillRef>
+      <a:effectRef idx="0">
+        <a:scrgbClr r="0" g="0" b="0"/>
+      </a:effectRef>
+      <a:fontRef idx="minor"/>
+    </dgm:style>
+  </dgm:styleLbl>
+  <dgm:styleLbl name="alignImgPlace1">
+    <dgm:scene3d>
+      <a:camera prst="orthographicFront"/>
+      <a:lightRig rig="threePt" dir="t"/>
+    </dgm:scene3d>
+    <dgm:sp3d/>
+    <dgm:txPr/>
+    <dgm:style>
+      <a:lnRef idx="2">
+        <a:scrgbClr r="0" g="0" b="0"/>
+      </a:lnRef>
+      <a:fillRef idx="1">
+        <a:scrgbClr r="0" g="0" b="0"/>
+      </a:fillRef>
+      <a:effectRef idx="0">
+        <a:scrgbClr r="0" g="0" b="0"/>
+      </a:effectRef>
+      <a:fontRef idx="minor"/>
+    </dgm:style>
+  </dgm:styleLbl>
+  <dgm:styleLbl name="bgImgPlace1">
+    <dgm:scene3d>
+      <a:camera prst="orthographicFront"/>
+      <a:lightRig rig="threePt" dir="t"/>
+    </dgm:scene3d>
+    <dgm:sp3d/>
+    <dgm:txPr/>
+    <dgm:style>
+      <a:lnRef idx="2">
+        <a:scrgbClr r="0" g="0" b="0"/>
+      </a:lnRef>
+      <a:fillRef idx="1">
+        <a:scrgbClr r="0" g="0" b="0"/>
+      </a:fillRef>
+      <a:effectRef idx="0">
+        <a:scrgbClr r="0" g="0" b="0"/>
+      </a:effectRef>
+      <a:fontRef idx="minor"/>
+    </dgm:style>
+  </dgm:styleLbl>
+  <dgm:styleLbl name="sibTrans2D1">
+    <dgm:scene3d>
+      <a:camera prst="orthographicFront"/>
+      <a:lightRig rig="threePt" dir="t"/>
+    </dgm:scene3d>
+    <dgm:sp3d/>
+    <dgm:txPr/>
+    <dgm:style>
+      <a:lnRef idx="0">
+        <a:scrgbClr r="0" g="0" b="0"/>
+      </a:lnRef>
+      <a:fillRef idx="1">
+        <a:scrgbClr r="0" g="0" b="0"/>
+      </a:fillRef>
+      <a:effectRef idx="0">
+        <a:scrgbClr r="0" g="0" b="0"/>
+      </a:effectRef>
+      <a:fontRef idx="minor">
+        <a:schemeClr val="lt1"/>
+      </a:fontRef>
+    </dgm:style>
+  </dgm:styleLbl>
+  <dgm:styleLbl name="fgSibTrans2D1">
+    <dgm:scene3d>
+      <a:camera prst="orthographicFront"/>
+      <a:lightRig rig="threePt" dir="t"/>
+    </dgm:scene3d>
+    <dgm:sp3d/>
+    <dgm:txPr/>
+    <dgm:style>
+      <a:lnRef idx="0">
+        <a:scrgbClr r="0" g="0" b="0"/>
+      </a:lnRef>
+      <a:fillRef idx="1">
+        <a:scrgbClr r="0" g="0" b="0"/>
+      </a:fillRef>
+      <a:effectRef idx="0">
+        <a:scrgbClr r="0" g="0" b="0"/>
+      </a:effectRef>
+      <a:fontRef idx="minor">
+        <a:schemeClr val="lt1"/>
+      </a:fontRef>
+    </dgm:style>
+  </dgm:styleLbl>
+  <dgm:styleLbl name="bgSibTrans2D1">
+    <dgm:scene3d>
+      <a:camera prst="orthographicFront"/>
+      <a:lightRig rig="threePt" dir="t"/>
+    </dgm:scene3d>
+    <dgm:sp3d/>
+    <dgm:txPr/>
+    <dgm:style>
+      <a:lnRef idx="0">
+        <a:scrgbClr r="0" g="0" b="0"/>
+      </a:lnRef>
+      <a:fillRef idx="1">
+        <a:scrgbClr r="0" g="0" b="0"/>
+      </a:fillRef>
+      <a:effectRef idx="0">
+        <a:scrgbClr r="0" g="0" b="0"/>
+      </a:effectRef>
+      <a:fontRef idx="minor">
+        <a:schemeClr val="lt1"/>
+      </a:fontRef>
+    </dgm:style>
+  </dgm:styleLbl>
+  <dgm:styleLbl name="sibTrans1D1">
+    <dgm:scene3d>
+      <a:camera prst="orthographicFront"/>
+      <a:lightRig rig="threePt" dir="t"/>
+    </dgm:scene3d>
+    <dgm:sp3d/>
+    <dgm:txPr/>
+    <dgm:style>
+      <a:lnRef idx="1">
+        <a:scrgbClr r="0" g="0" b="0"/>
+      </a:lnRef>
+      <a:fillRef idx="0">
+        <a:scrgbClr r="0" g="0" b="0"/>
+      </a:fillRef>
+      <a:effectRef idx="0">
+        <a:scrgbClr r="0" g="0" b="0"/>
+      </a:effectRef>
+      <a:fontRef idx="minor"/>
+    </dgm:style>
+  </dgm:styleLbl>
+  <dgm:styleLbl name="callout">
+    <dgm:scene3d>
+      <a:camera prst="orthographicFront"/>
+      <a:lightRig rig="threePt" dir="t"/>
+    </dgm:scene3d>
+    <dgm:sp3d/>
+    <dgm:txPr/>
+    <dgm:style>
+      <a:lnRef idx="2">
+        <a:scrgbClr r="0" g="0" b="0"/>
+      </a:lnRef>
+      <a:fillRef idx="1">
+        <a:scrgbClr r="0" g="0" b="0"/>
+      </a:fillRef>
+      <a:effectRef idx="0">
+        <a:scrgbClr r="0" g="0" b="0"/>
+      </a:effectRef>
+      <a:fontRef idx="minor"/>
+    </dgm:style>
+  </dgm:styleLbl>
+  <dgm:styleLbl name="asst0">
+    <dgm:scene3d>
+      <a:camera prst="orthographicFront"/>
+      <a:lightRig rig="threePt" dir="t"/>
+    </dgm:scene3d>
+    <dgm:sp3d/>
+    <dgm:txPr/>
+    <dgm:style>
+      <a:lnRef idx="2">
+        <a:scrgbClr r="0" g="0" b="0"/>
+      </a:lnRef>
+      <a:fillRef idx="1">
+        <a:scrgbClr r="0" g="0" b="0"/>
+      </a:fillRef>
+      <a:effectRef idx="0">
+        <a:scrgbClr r="0" g="0" b="0"/>
+      </a:effectRef>
+      <a:fontRef idx="minor">
+        <a:schemeClr val="lt1"/>
+      </a:fontRef>
+    </dgm:style>
+  </dgm:styleLbl>
+  <dgm:styleLbl name="asst1">
+    <dgm:scene3d>
+      <a:camera prst="orthographicFront"/>
+      <a:lightRig rig="threePt" dir="t"/>
+    </dgm:scene3d>
+    <dgm:sp3d/>
+    <dgm:txPr/>
+    <dgm:style>
+      <a:lnRef idx="2">
+        <a:scrgbClr r="0" g="0" b="0"/>
+      </a:lnRef>
+      <a:fillRef idx="1">
+        <a:scrgbClr r="0" g="0" b="0"/>
+      </a:fillRef>
+      <a:effectRef idx="0">
+        <a:scrgbClr r="0" g="0" b="0"/>
+      </a:effectRef>
+      <a:fontRef idx="minor">
+        <a:schemeClr val="lt1"/>
+      </a:fontRef>
+    </dgm:style>
+  </dgm:styleLbl>
+  <dgm:styleLbl name="asst2">
+    <dgm:scene3d>
+      <a:camera prst="orthographicFront"/>
+      <a:lightRig rig="threePt" dir="t"/>
+    </dgm:scene3d>
+    <dgm:sp3d/>
+    <dgm:txPr/>
+    <dgm:style>
+      <a:lnRef idx="2">
+        <a:scrgbClr r="0" g="0" b="0"/>
+      </a:lnRef>
+      <a:fillRef idx="1">
+        <a:scrgbClr r="0" g="0" b="0"/>
+      </a:fillRef>
+      <a:effectRef idx="0">
+        <a:scrgbClr r="0" g="0" b="0"/>
+      </a:effectRef>
+      <a:fontRef idx="minor">
+        <a:schemeClr val="lt1"/>
+      </a:fontRef>
+    </dgm:style>
+  </dgm:styleLbl>
+  <dgm:styleLbl name="asst3">
+    <dgm:scene3d>
+      <a:camera prst="orthographicFront"/>
+      <a:lightRig rig="threePt" dir="t"/>
+    </dgm:scene3d>
+    <dgm:sp3d/>
+    <dgm:txPr/>
+    <dgm:style>
+      <a:lnRef idx="2">
+        <a:scrgbClr r="0" g="0" b="0"/>
+      </a:lnRef>
+      <a:fillRef idx="1">
+        <a:scrgbClr r="0" g="0" b="0"/>
+      </a:fillRef>
+      <a:effectRef idx="0">
+        <a:scrgbClr r="0" g="0" b="0"/>
+      </a:effectRef>
+      <a:fontRef idx="minor">
+        <a:schemeClr val="lt1"/>
+      </a:fontRef>
+    </dgm:style>
+  </dgm:styleLbl>
+  <dgm:styleLbl name="asst4">
+    <dgm:scene3d>
+      <a:camera prst="orthographicFront"/>
+      <a:lightRig rig="threePt" dir="t"/>
+    </dgm:scene3d>
+    <dgm:sp3d/>
+    <dgm:txPr/>
+    <dgm:style>
+      <a:lnRef idx="2">
+        <a:scrgbClr r="0" g="0" b="0"/>
+      </a:lnRef>
+      <a:fillRef idx="1">
+        <a:scrgbClr r="0" g="0" b="0"/>
+      </a:fillRef>
+      <a:effectRef idx="0">
+        <a:scrgbClr r="0" g="0" b="0"/>
+      </a:effectRef>
+      <a:fontRef idx="minor">
+        <a:schemeClr val="lt1"/>
+      </a:fontRef>
+    </dgm:style>
+  </dgm:styleLbl>
+  <dgm:styleLbl name="parChTrans2D1">
+    <dgm:scene3d>
+      <a:camera prst="orthographicFront"/>
+      <a:lightRig rig="threePt" dir="t"/>
+    </dgm:scene3d>
+    <dgm:sp3d/>
+    <dgm:txPr/>
+    <dgm:style>
+      <a:lnRef idx="2">
+        <a:scrgbClr r="0" g="0" b="0"/>
+      </a:lnRef>
+      <a:fillRef idx="1">
+        <a:scrgbClr r="0" g="0" b="0"/>
+      </a:fillRef>
+      <a:effectRef idx="0">
+        <a:scrgbClr r="0" g="0" b="0"/>
+      </a:effectRef>
+      <a:fontRef idx="minor">
+        <a:schemeClr val="lt1"/>
+      </a:fontRef>
+    </dgm:style>
+  </dgm:styleLbl>
+  <dgm:styleLbl name="parChTrans2D2">
+    <dgm:scene3d>
+      <a:camera prst="orthographicFront"/>
+      <a:lightRig rig="threePt" dir="t"/>
+    </dgm:scene3d>
+    <dgm:sp3d/>
+    <dgm:txPr/>
+    <dgm:style>
+      <a:lnRef idx="2">
+        <a:scrgbClr r="0" g="0" b="0"/>
+      </a:lnRef>
+      <a:fillRef idx="1">
+        <a:scrgbClr r="0" g="0" b="0"/>
+      </a:fillRef>
+      <a:effectRef idx="0">
+        <a:scrgbClr r="0" g="0" b="0"/>
+      </a:effectRef>
+      <a:fontRef idx="minor">
+        <a:schemeClr val="lt1"/>
+      </a:fontRef>
+    </dgm:style>
+  </dgm:styleLbl>
+  <dgm:styleLbl name="parChTrans2D3">
+    <dgm:scene3d>
+      <a:camera prst="orthographicFront"/>
+      <a:lightRig rig="threePt" dir="t"/>
+    </dgm:scene3d>
+    <dgm:sp3d/>
+    <dgm:txPr/>
+    <dgm:style>
+      <a:lnRef idx="2">
+        <a:scrgbClr r="0" g="0" b="0"/>
+      </a:lnRef>
+      <a:fillRef idx="1">
+        <a:scrgbClr r="0" g="0" b="0"/>
+      </a:fillRef>
+      <a:effectRef idx="0">
+        <a:scrgbClr r="0" g="0" b="0"/>
+      </a:effectRef>
+      <a:fontRef idx="minor">
+        <a:schemeClr val="lt1"/>
+      </a:fontRef>
+    </dgm:style>
+  </dgm:styleLbl>
+  <dgm:styleLbl name="parChTrans2D4">
+    <dgm:scene3d>
+      <a:camera prst="orthographicFront"/>
+      <a:lightRig rig="threePt" dir="t"/>
+    </dgm:scene3d>
+    <dgm:sp3d/>
+    <dgm:txPr/>
+    <dgm:style>
+      <a:lnRef idx="2">
+        <a:scrgbClr r="0" g="0" b="0"/>
+      </a:lnRef>
+      <a:fillRef idx="1">
+        <a:scrgbClr r="0" g="0" b="0"/>
+      </a:fillRef>
+      <a:effectRef idx="0">
+        <a:scrgbClr r="0" g="0" b="0"/>
+      </a:effectRef>
+      <a:fontRef idx="minor">
+        <a:schemeClr val="lt1"/>
+      </a:fontRef>
+    </dgm:style>
+  </dgm:styleLbl>
+  <dgm:styleLbl name="parChTrans1D1">
+    <dgm:scene3d>
+      <a:camera prst="orthographicFront"/>
+      <a:lightRig rig="threePt" dir="t"/>
+    </dgm:scene3d>
+    <dgm:sp3d/>
+    <dgm:txPr/>
+    <dgm:style>
+      <a:lnRef idx="2">
+        <a:scrgbClr r="0" g="0" b="0"/>
+      </a:lnRef>
+      <a:fillRef idx="0">
+        <a:scrgbClr r="0" g="0" b="0"/>
+      </a:fillRef>
+      <a:effectRef idx="0">
+        <a:scrgbClr r="0" g="0" b="0"/>
+      </a:effectRef>
+      <a:fontRef idx="minor"/>
+    </dgm:style>
+  </dgm:styleLbl>
+  <dgm:styleLbl name="parChTrans1D2">
+    <dgm:scene3d>
+      <a:camera prst="orthographicFront"/>
+      <a:lightRig rig="threePt" dir="t"/>
+    </dgm:scene3d>
+    <dgm:sp3d/>
+    <dgm:txPr/>
+    <dgm:style>
+      <a:lnRef idx="2">
+        <a:scrgbClr r="0" g="0" b="0"/>
+      </a:lnRef>
+      <a:fillRef idx="0">
+        <a:scrgbClr r="0" g="0" b="0"/>
+      </a:fillRef>
+      <a:effectRef idx="0">
+        <a:scrgbClr r="0" g="0" b="0"/>
+      </a:effectRef>
+      <a:fontRef idx="minor"/>
+    </dgm:style>
+  </dgm:styleLbl>
+  <dgm:styleLbl name="parChTrans1D3">
+    <dgm:scene3d>
+      <a:camera prst="orthographicFront"/>
+      <a:lightRig rig="threePt" dir="t"/>
+    </dgm:scene3d>
+    <dgm:sp3d/>
+    <dgm:txPr/>
+    <dgm:style>
+      <a:lnRef idx="2">
+        <a:scrgbClr r="0" g="0" b="0"/>
+      </a:lnRef>
+      <a:fillRef idx="0">
+        <a:scrgbClr r="0" g="0" b="0"/>
+      </a:fillRef>
+      <a:effectRef idx="0">
+        <a:scrgbClr r="0" g="0" b="0"/>
+      </a:effectRef>
+      <a:fontRef idx="minor"/>
+    </dgm:style>
+  </dgm:styleLbl>
+  <dgm:styleLbl name="parChTrans1D4">
+    <dgm:scene3d>
+      <a:camera prst="orthographicFront"/>
+      <a:lightRig rig="threePt" dir="t"/>
+    </dgm:scene3d>
+    <dgm:sp3d/>
+    <dgm:txPr/>
+    <dgm:style>
+      <a:lnRef idx="2">
+        <a:scrgbClr r="0" g="0" b="0"/>
+      </a:lnRef>
+      <a:fillRef idx="0">
+        <a:scrgbClr r="0" g="0" b="0"/>
+      </a:fillRef>
+      <a:effectRef idx="0">
+        <a:scrgbClr r="0" g="0" b="0"/>
+      </a:effectRef>
+      <a:fontRef idx="minor"/>
+    </dgm:style>
+  </dgm:styleLbl>
+  <dgm:styleLbl name="fgAcc1">
+    <dgm:scene3d>
+      <a:camera prst="orthographicFront"/>
+      <a:lightRig rig="threePt" dir="t"/>
+    </dgm:scene3d>
+    <dgm:sp3d/>
+    <dgm:txPr/>
+    <dgm:style>
+      <a:lnRef idx="2">
+        <a:scrgbClr r="0" g="0" b="0"/>
+      </a:lnRef>
+      <a:fillRef idx="1">
+        <a:scrgbClr r="0" g="0" b="0"/>
+      </a:fillRef>
+      <a:effectRef idx="0">
+        <a:scrgbClr r="0" g="0" b="0"/>
+      </a:effectRef>
+      <a:fontRef idx="minor"/>
+    </dgm:style>
+  </dgm:styleLbl>
+  <dgm:styleLbl name="conFgAcc1">
+    <dgm:scene3d>
+      <a:camera prst="orthographicFront"/>
+      <a:lightRig rig="threePt" dir="t"/>
+    </dgm:scene3d>
+    <dgm:sp3d/>
+    <dgm:txPr/>
+    <dgm:style>
+      <a:lnRef idx="2">
+        <a:scrgbClr r="0" g="0" b="0"/>
+      </a:lnRef>
+      <a:fillRef idx="1">
+        <a:scrgbClr r="0" g="0" b="0"/>
+      </a:fillRef>
+      <a:effectRef idx="0">
+        <a:scrgbClr r="0" g="0" b="0"/>
+      </a:effectRef>
+      <a:fontRef idx="minor"/>
+    </dgm:style>
+  </dgm:styleLbl>
+  <dgm:styleLbl name="alignAcc1">
+    <dgm:scene3d>
+      <a:camera prst="orthographicFront"/>
+      <a:lightRig rig="threePt" dir="t"/>
+    </dgm:scene3d>
+    <dgm:sp3d/>
+    <dgm:txPr/>
+    <dgm:style>
+      <a:lnRef idx="2">
+        <a:scrgbClr r="0" g="0" b="0"/>
+      </a:lnRef>
+      <a:fillRef idx="1">
+        <a:scrgbClr r="0" g="0" b="0"/>
+      </a:fillRef>
+      <a:effectRef idx="0">
+        <a:scrgbClr r="0" g="0" b="0"/>
+      </a:effectRef>
+      <a:fontRef idx="minor"/>
+    </dgm:style>
+  </dgm:styleLbl>
+  <dgm:styleLbl name="trAlignAcc1">
+    <dgm:scene3d>
+      <a:camera prst="orthographicFront"/>
+      <a:lightRig rig="threePt" dir="t"/>
+    </dgm:scene3d>
+    <dgm:sp3d/>
+    <dgm:txPr/>
+    <dgm:style>
+      <a:lnRef idx="1">
+        <a:scrgbClr r="0" g="0" b="0"/>
+      </a:lnRef>
+      <a:fillRef idx="1">
+        <a:scrgbClr r="0" g="0" b="0"/>
+      </a:fillRef>
+      <a:effectRef idx="0">
+        <a:scrgbClr r="0" g="0" b="0"/>
+      </a:effectRef>
+      <a:fontRef idx="minor"/>
+    </dgm:style>
+  </dgm:styleLbl>
+  <dgm:styleLbl name="bgAcc1">
+    <dgm:scene3d>
+      <a:camera prst="orthographicFront"/>
+      <a:lightRig rig="threePt" dir="t"/>
+    </dgm:scene3d>
+    <dgm:sp3d/>
+    <dgm:txPr/>
+    <dgm:style>
+      <a:lnRef idx="2">
+        <a:scrgbClr r="0" g="0" b="0"/>
+      </a:lnRef>
+      <a:fillRef idx="1">
+        <a:scrgbClr r="0" g="0" b="0"/>
+      </a:fillRef>
+      <a:effectRef idx="0">
+        <a:scrgbClr r="0" g="0" b="0"/>
+      </a:effectRef>
+      <a:fontRef idx="minor"/>
+    </dgm:style>
+  </dgm:styleLbl>
+  <dgm:styleLbl name="solidFgAcc1">
+    <dgm:scene3d>
+      <a:camera prst="orthographicFront"/>
+      <a:lightRig rig="threePt" dir="t"/>
+    </dgm:scene3d>
+    <dgm:sp3d/>
+    <dgm:txPr/>
+    <dgm:style>
+      <a:lnRef idx="2">
+        <a:scrgbClr r="0" g="0" b="0"/>
+      </a:lnRef>
+      <a:fillRef idx="1">
+        <a:scrgbClr r="0" g="0" b="0"/>
+      </a:fillRef>
+      <a:effectRef idx="0">
+        <a:scrgbClr r="0" g="0" b="0"/>
+      </a:effectRef>
+      <a:fontRef idx="minor"/>
+    </dgm:style>
+  </dgm:styleLbl>
+  <dgm:styleLbl name="solidAlignAcc1">
+    <dgm:scene3d>
+      <a:camera prst="orthographicFront"/>
+      <a:lightRig rig="threePt" dir="t"/>
+    </dgm:scene3d>
+    <dgm:sp3d/>
+    <dgm:txPr/>
+    <dgm:style>
+      <a:lnRef idx="2">
+        <a:scrgbClr r="0" g="0" b="0"/>
+      </a:lnRef>
+      <a:fillRef idx="1">
+        <a:scrgbClr r="0" g="0" b="0"/>
+      </a:fillRef>
+      <a:effectRef idx="0">
+        <a:scrgbClr r="0" g="0" b="0"/>
+      </a:effectRef>
+      <a:fontRef idx="minor"/>
+    </dgm:style>
+  </dgm:styleLbl>
+  <dgm:styleLbl name="solidBgAcc1">
+    <dgm:scene3d>
+      <a:camera prst="orthographicFront"/>
+      <a:lightRig rig="threePt" dir="t"/>
+    </dgm:scene3d>
+    <dgm:sp3d/>
+    <dgm:txPr/>
+    <dgm:style>
+      <a:lnRef idx="2">
+        <a:scrgbClr r="0" g="0" b="0"/>
+      </a:lnRef>
+      <a:fillRef idx="1">
+        <a:scrgbClr r="0" g="0" b="0"/>
+      </a:fillRef>
+      <a:effectRef idx="0">
+        <a:scrgbClr r="0" g="0" b="0"/>
+      </a:effectRef>
+      <a:fontRef idx="minor"/>
+    </dgm:style>
+  </dgm:styleLbl>
+  <dgm:styleLbl name="fgAccFollowNode1">
+    <dgm:scene3d>
+      <a:camera prst="orthographicFront"/>
+      <a:lightRig rig="threePt" dir="t"/>
+    </dgm:scene3d>
+    <dgm:sp3d/>
+    <dgm:txPr/>
+    <dgm:style>
+      <a:lnRef idx="2">
+        <a:scrgbClr r="0" g="0" b="0"/>
+      </a:lnRef>
+      <a:fillRef idx="1">
+        <a:scrgbClr r="0" g="0" b="0"/>
+      </a:fillRef>
+      <a:effectRef idx="0">
+        <a:scrgbClr r="0" g="0" b="0"/>
+      </a:effectRef>
+      <a:fontRef idx="minor"/>
+    </dgm:style>
+  </dgm:styleLbl>
+  <dgm:styleLbl name="alignAccFollowNode1">
+    <dgm:scene3d>
+      <a:camera prst="orthographicFront"/>
+      <a:lightRig rig="threePt" dir="t"/>
+    </dgm:scene3d>
+    <dgm:sp3d/>
+    <dgm:txPr/>
+    <dgm:style>
+      <a:lnRef idx="2">
+        <a:scrgbClr r="0" g="0" b="0"/>
+      </a:lnRef>
+      <a:fillRef idx="1">
+        <a:scrgbClr r="0" g="0" b="0"/>
+      </a:fillRef>
+      <a:effectRef idx="0">
+        <a:scrgbClr r="0" g="0" b="0"/>
+      </a:effectRef>
+      <a:fontRef idx="minor"/>
+    </dgm:style>
+  </dgm:styleLbl>
+  <dgm:styleLbl name="bgAccFollowNode1">
+    <dgm:scene3d>
+      <a:camera prst="orthographicFront"/>
+      <a:lightRig rig="threePt" dir="t"/>
+    </dgm:scene3d>
+    <dgm:sp3d/>
+    <dgm:txPr/>
+    <dgm:style>
+      <a:lnRef idx="2">
+        <a:scrgbClr r="0" g="0" b="0"/>
+      </a:lnRef>
+      <a:fillRef idx="1">
+        <a:scrgbClr r="0" g="0" b="0"/>
+      </a:fillRef>
+      <a:effectRef idx="0">
+        <a:scrgbClr r="0" g="0" b="0"/>
+      </a:effectRef>
+      <a:fontRef idx="minor"/>
+    </dgm:style>
+  </dgm:styleLbl>
+  <dgm:styleLbl name="fgAcc0">
+    <dgm:scene3d>
+      <a:camera prst="orthographicFront"/>
+      <a:lightRig rig="threePt" dir="t"/>
+    </dgm:scene3d>
+    <dgm:sp3d/>
+    <dgm:txPr/>
+    <dgm:style>
+      <a:lnRef idx="2">
+        <a:scrgbClr r="0" g="0" b="0"/>
+      </a:lnRef>
+      <a:fillRef idx="1">
+        <a:scrgbClr r="0" g="0" b="0"/>
+      </a:fillRef>
+      <a:effectRef idx="0">
+        <a:scrgbClr r="0" g="0" b="0"/>
+      </a:effectRef>
+      <a:fontRef idx="minor"/>
+    </dgm:style>
+  </dgm:styleLbl>
+  <dgm:styleLbl name="fgAcc2">
+    <dgm:scene3d>
+      <a:camera prst="orthographicFront"/>
+      <a:lightRig rig="threePt" dir="t"/>
+    </dgm:scene3d>
+    <dgm:sp3d/>
+    <dgm:txPr/>
+    <dgm:style>
+      <a:lnRef idx="2">
+        <a:scrgbClr r="0" g="0" b="0"/>
+      </a:lnRef>
+      <a:fillRef idx="1">
+        <a:scrgbClr r="0" g="0" b="0"/>
+      </a:fillRef>
+      <a:effectRef idx="0">
+        <a:scrgbClr r="0" g="0" b="0"/>
+      </a:effectRef>
+      <a:fontRef idx="minor"/>
+    </dgm:style>
+  </dgm:styleLbl>
+  <dgm:styleLbl name="fgAcc3">
+    <dgm:scene3d>
+      <a:camera prst="orthographicFront"/>
+      <a:lightRig rig="threePt" dir="t"/>
+    </dgm:scene3d>
+    <dgm:sp3d/>
+    <dgm:txPr/>
+    <dgm:style>
+      <a:lnRef idx="2">
+        <a:scrgbClr r="0" g="0" b="0"/>
+      </a:lnRef>
+      <a:fillRef idx="1">
+        <a:scrgbClr r="0" g="0" b="0"/>
+      </a:fillRef>
+      <a:effectRef idx="0">
+        <a:scrgbClr r="0" g="0" b="0"/>
+      </a:effectRef>
+      <a:fontRef idx="minor"/>
+    </dgm:style>
+  </dgm:styleLbl>
+  <dgm:styleLbl name="fgAcc4">
+    <dgm:scene3d>
+      <a:camera prst="orthographicFront"/>
+      <a:lightRig rig="threePt" dir="t"/>
+    </dgm:scene3d>
+    <dgm:sp3d/>
+    <dgm:txPr/>
+    <dgm:style>
+      <a:lnRef idx="2">
+        <a:scrgbClr r="0" g="0" b="0"/>
+      </a:lnRef>
+      <a:fillRef idx="1">
+        <a:scrgbClr r="0" g="0" b="0"/>
+      </a:fillRef>
+      <a:effectRef idx="0">
+        <a:scrgbClr r="0" g="0" b="0"/>
+      </a:effectRef>
+      <a:fontRef idx="minor"/>
+    </dgm:style>
+  </dgm:styleLbl>
+  <dgm:styleLbl name="bgShp">
+    <dgm:scene3d>
+      <a:camera prst="orthographicFront"/>
+      <a:lightRig rig="threePt" dir="t"/>
+    </dgm:scene3d>
+    <dgm:sp3d/>
+    <dgm:txPr/>
+    <dgm:style>
+      <a:lnRef idx="0">
+        <a:scrgbClr r="0" g="0" b="0"/>
+      </a:lnRef>
+      <a:fillRef idx="1">
+        <a:scrgbClr r="0" g="0" b="0"/>
+      </a:fillRef>
+      <a:effectRef idx="0">
+        <a:scrgbClr r="0" g="0" b="0"/>
+      </a:effectRef>
+      <a:fontRef idx="minor"/>
+    </dgm:style>
+  </dgm:styleLbl>
+  <dgm:styleLbl name="dkBgShp">
+    <dgm:scene3d>
+      <a:camera prst="orthographicFront"/>
+      <a:lightRig rig="threePt" dir="t"/>
+    </dgm:scene3d>
+    <dgm:sp3d/>
+    <dgm:txPr/>
+    <dgm:style>
+      <a:lnRef idx="0">
+        <a:scrgbClr r="0" g="0" b="0"/>
+      </a:lnRef>
+      <a:fillRef idx="1">
+        <a:scrgbClr r="0" g="0" b="0"/>
+      </a:fillRef>
+      <a:effectRef idx="0">
+        <a:scrgbClr r="0" g="0" b="0"/>
+      </a:effectRef>
+      <a:fontRef idx="minor"/>
+    </dgm:style>
+  </dgm:styleLbl>
+  <dgm:styleLbl name="trBgShp">
+    <dgm:scene3d>
+      <a:camera prst="orthographicFront"/>
+      <a:lightRig rig="threePt" dir="t"/>
+    </dgm:scene3d>
+    <dgm:sp3d/>
+    <dgm:txPr/>
+    <dgm:style>
+      <a:lnRef idx="0">
+        <a:scrgbClr r="0" g="0" b="0"/>
+      </a:lnRef>
+      <a:fillRef idx="1">
+        <a:scrgbClr r="0" g="0" b="0"/>
+      </a:fillRef>
+      <a:effectRef idx="0">
+        <a:scrgbClr r="0" g="0" b="0"/>
+      </a:effectRef>
+      <a:fontRef idx="minor"/>
+    </dgm:style>
+  </dgm:styleLbl>
+  <dgm:styleLbl name="fgShp">
+    <dgm:scene3d>
+      <a:camera prst="orthographicFront"/>
+      <a:lightRig rig="threePt" dir="t"/>
+    </dgm:scene3d>
+    <dgm:sp3d/>
+    <dgm:txPr/>
+    <dgm:style>
+      <a:lnRef idx="2">
+        <a:scrgbClr r="0" g="0" b="0"/>
+      </a:lnRef>
+      <a:fillRef idx="1">
+        <a:scrgbClr r="0" g="0" b="0"/>
+      </a:fillRef>
+      <a:effectRef idx="0">
         <a:scrgbClr r="0" g="0" b="0"/>
       </a:effectRef>
       <a:fontRef idx="minor"/>
@@ -17288,6 +20240,411 @@
     <p:extLst>
       <p:ext uri="{BB962C8B-B14F-4D97-AF65-F5344CB8AC3E}">
         <p14:creationId xmlns:p14="http://schemas.microsoft.com/office/powerpoint/2010/main" val="821744723"/>
+      </p:ext>
+    </p:extLst>
+  </p:cSld>
+  <p:clrMapOvr>
+    <a:masterClrMapping/>
+  </p:clrMapOvr>
+</p:sld>
+</file>
+
+<file path=ppt/slides/slide31.xml><?xml version="1.0" encoding="utf-8"?>
+<p:sld xmlns:a="http://schemas.openxmlformats.org/drawingml/2006/main" xmlns:r="http://schemas.openxmlformats.org/officeDocument/2006/relationships" xmlns:p="http://schemas.openxmlformats.org/presentationml/2006/main">
+  <p:cSld>
+    <p:spTree>
+      <p:nvGrpSpPr>
+        <p:cNvPr id="1" name=""/>
+        <p:cNvGrpSpPr/>
+        <p:nvPr/>
+      </p:nvGrpSpPr>
+      <p:grpSpPr>
+        <a:xfrm>
+          <a:off x="0" y="0"/>
+          <a:ext cx="0" cy="0"/>
+          <a:chOff x="0" y="0"/>
+          <a:chExt cx="0" cy="0"/>
+        </a:xfrm>
+      </p:grpSpPr>
+      <p:sp>
+        <p:nvSpPr>
+          <p:cNvPr id="2" name="Titre 1">
+            <a:extLst>
+              <a:ext uri="{FF2B5EF4-FFF2-40B4-BE49-F238E27FC236}">
+                <a16:creationId xmlns:a16="http://schemas.microsoft.com/office/drawing/2014/main" id="{A27B5DFA-074D-24F6-9FC8-028BB270FDDA}"/>
+              </a:ext>
+            </a:extLst>
+          </p:cNvPr>
+          <p:cNvSpPr>
+            <a:spLocks noGrp="1"/>
+          </p:cNvSpPr>
+          <p:nvPr>
+            <p:ph type="title"/>
+          </p:nvPr>
+        </p:nvSpPr>
+        <p:spPr/>
+        <p:txBody>
+          <a:bodyPr/>
+          <a:lstStyle/>
+          <a:p>
+            <a:r>
+              <a:rPr lang="fr-FR" dirty="0"/>
+              <a:t>Rapidité</a:t>
+            </a:r>
+          </a:p>
+        </p:txBody>
+      </p:sp>
+      <p:sp>
+        <p:nvSpPr>
+          <p:cNvPr id="3" name="Espace réservé du contenu 2">
+            <a:extLst>
+              <a:ext uri="{FF2B5EF4-FFF2-40B4-BE49-F238E27FC236}">
+                <a16:creationId xmlns:a16="http://schemas.microsoft.com/office/drawing/2014/main" id="{041ECFA8-5979-77EF-7734-6F2C30D476E0}"/>
+              </a:ext>
+            </a:extLst>
+          </p:cNvPr>
+          <p:cNvSpPr>
+            <a:spLocks noGrp="1"/>
+          </p:cNvSpPr>
+          <p:nvPr>
+            <p:ph idx="1"/>
+          </p:nvPr>
+        </p:nvSpPr>
+        <p:spPr/>
+        <p:txBody>
+          <a:bodyPr/>
+          <a:lstStyle/>
+          <a:p>
+            <a:r>
+              <a:rPr lang="fr-FR" sz="2400" dirty="0"/>
+              <a:t>CPU</a:t>
+            </a:r>
+          </a:p>
+          <a:p>
+            <a:pPr lvl="1"/>
+            <a:r>
+              <a:rPr lang="fr-FR" sz="2000" dirty="0"/>
+              <a:t>4 à 8 </a:t>
+            </a:r>
+            <a:r>
+              <a:rPr lang="fr-FR" sz="2000" dirty="0" err="1"/>
+              <a:t>token</a:t>
+            </a:r>
+            <a:r>
+              <a:rPr lang="fr-FR" sz="2000" dirty="0"/>
+              <a:t> / s</a:t>
+            </a:r>
+          </a:p>
+          <a:p>
+            <a:pPr lvl="1"/>
+            <a:r>
+              <a:rPr lang="fr-FR" sz="2000" dirty="0"/>
+              <a:t>15K à 30KT/h</a:t>
+            </a:r>
+          </a:p>
+          <a:p>
+            <a:pPr lvl="1"/>
+            <a:r>
+              <a:rPr lang="fr-FR" sz="2000" dirty="0"/>
+              <a:t>40 prompt/h pour 1 machine</a:t>
+            </a:r>
+          </a:p>
+          <a:p>
+            <a:pPr lvl="1"/>
+            <a:r>
+              <a:rPr lang="fr-FR" sz="2000" dirty="0"/>
+              <a:t>1 humain</a:t>
+            </a:r>
+          </a:p>
+          <a:p>
+            <a:r>
+              <a:rPr lang="fr-FR" sz="2400" dirty="0"/>
+              <a:t>GPU RTX</a:t>
+            </a:r>
+          </a:p>
+          <a:p>
+            <a:pPr lvl="1"/>
+            <a:r>
+              <a:rPr lang="fr-FR" sz="2000" dirty="0"/>
+              <a:t>20 à 60 T/s suivant </a:t>
+            </a:r>
+            <a:r>
+              <a:rPr lang="fr-FR" sz="2000" dirty="0" err="1"/>
+              <a:t>quantisation</a:t>
+            </a:r>
+            <a:r>
+              <a:rPr lang="fr-FR" sz="2000" dirty="0"/>
+              <a:t> et taille du modèle</a:t>
+            </a:r>
+          </a:p>
+          <a:p>
+            <a:pPr lvl="1"/>
+            <a:r>
+              <a:rPr lang="fr-FR" sz="2000" dirty="0"/>
+              <a:t>72 à 216KT/h</a:t>
+            </a:r>
+          </a:p>
+          <a:p>
+            <a:pPr lvl="1"/>
+            <a:r>
+              <a:rPr lang="fr-FR" sz="2000" dirty="0"/>
+              <a:t>200 prompt/h</a:t>
+            </a:r>
+          </a:p>
+          <a:p>
+            <a:pPr lvl="1"/>
+            <a:r>
+              <a:rPr lang="fr-FR" sz="2000" dirty="0"/>
+              <a:t>4 humains</a:t>
+            </a:r>
+          </a:p>
+          <a:p>
+            <a:r>
+              <a:rPr lang="fr-FR" sz="2400" dirty="0"/>
+              <a:t>GPU Rapide (€++)</a:t>
+            </a:r>
+          </a:p>
+          <a:p>
+            <a:pPr lvl="1"/>
+            <a:r>
+              <a:rPr lang="fr-FR" sz="2000" dirty="0"/>
+              <a:t>400 prompt/h</a:t>
+            </a:r>
+          </a:p>
+          <a:p>
+            <a:pPr lvl="1"/>
+            <a:r>
+              <a:rPr lang="fr-FR" sz="2000" dirty="0"/>
+              <a:t>8 humains</a:t>
+            </a:r>
+          </a:p>
+          <a:p>
+            <a:pPr lvl="1"/>
+            <a:endParaRPr lang="fr-FR" sz="2000" dirty="0"/>
+          </a:p>
+        </p:txBody>
+      </p:sp>
+    </p:spTree>
+    <p:extLst>
+      <p:ext uri="{BB962C8B-B14F-4D97-AF65-F5344CB8AC3E}">
+        <p14:creationId xmlns:p14="http://schemas.microsoft.com/office/powerpoint/2010/main" val="2717069634"/>
+      </p:ext>
+    </p:extLst>
+  </p:cSld>
+  <p:clrMapOvr>
+    <a:masterClrMapping/>
+  </p:clrMapOvr>
+</p:sld>
+</file>
+
+<file path=ppt/slides/slide32.xml><?xml version="1.0" encoding="utf-8"?>
+<p:sld xmlns:a="http://schemas.openxmlformats.org/drawingml/2006/main" xmlns:r="http://schemas.openxmlformats.org/officeDocument/2006/relationships" xmlns:p="http://schemas.openxmlformats.org/presentationml/2006/main">
+  <p:cSld>
+    <p:spTree>
+      <p:nvGrpSpPr>
+        <p:cNvPr id="1" name=""/>
+        <p:cNvGrpSpPr/>
+        <p:nvPr/>
+      </p:nvGrpSpPr>
+      <p:grpSpPr>
+        <a:xfrm>
+          <a:off x="0" y="0"/>
+          <a:ext cx="0" cy="0"/>
+          <a:chOff x="0" y="0"/>
+          <a:chExt cx="0" cy="0"/>
+        </a:xfrm>
+      </p:grpSpPr>
+      <p:sp>
+        <p:nvSpPr>
+          <p:cNvPr id="2" name="Titre 1">
+            <a:extLst>
+              <a:ext uri="{FF2B5EF4-FFF2-40B4-BE49-F238E27FC236}">
+                <a16:creationId xmlns:a16="http://schemas.microsoft.com/office/drawing/2014/main" id="{5751EE57-49B2-B69B-C170-91F6E67406C3}"/>
+              </a:ext>
+            </a:extLst>
+          </p:cNvPr>
+          <p:cNvSpPr>
+            <a:spLocks noGrp="1"/>
+          </p:cNvSpPr>
+          <p:nvPr>
+            <p:ph type="title"/>
+          </p:nvPr>
+        </p:nvSpPr>
+        <p:spPr/>
+        <p:txBody>
+          <a:bodyPr/>
+          <a:lstStyle/>
+          <a:p>
+            <a:r>
+              <a:rPr lang="fr-FR" dirty="0"/>
+              <a:t>TPU</a:t>
+            </a:r>
+          </a:p>
+        </p:txBody>
+      </p:sp>
+      <p:sp>
+        <p:nvSpPr>
+          <p:cNvPr id="3" name="Espace réservé du contenu 2">
+            <a:extLst>
+              <a:ext uri="{FF2B5EF4-FFF2-40B4-BE49-F238E27FC236}">
+                <a16:creationId xmlns:a16="http://schemas.microsoft.com/office/drawing/2014/main" id="{8E2EF33E-27BB-FF57-1D38-ABFA467881C3}"/>
+              </a:ext>
+            </a:extLst>
+          </p:cNvPr>
+          <p:cNvSpPr>
+            <a:spLocks noGrp="1"/>
+          </p:cNvSpPr>
+          <p:nvPr>
+            <p:ph idx="1"/>
+          </p:nvPr>
+        </p:nvSpPr>
+        <p:spPr/>
+        <p:txBody>
+          <a:bodyPr/>
+          <a:lstStyle/>
+          <a:p>
+            <a:r>
+              <a:rPr lang="fr-FR" dirty="0"/>
+              <a:t>TPU SaaS</a:t>
+            </a:r>
+          </a:p>
+          <a:p>
+            <a:pPr lvl="1"/>
+            <a:r>
+              <a:rPr lang="fr-FR" dirty="0"/>
+              <a:t>700 prompt/h</a:t>
+            </a:r>
+          </a:p>
+          <a:p>
+            <a:pPr lvl="1"/>
+            <a:r>
+              <a:rPr lang="fr-FR" dirty="0"/>
+              <a:t>15 humains</a:t>
+            </a:r>
+          </a:p>
+          <a:p>
+            <a:r>
+              <a:rPr lang="fr-FR" dirty="0"/>
+              <a:t>Pour les modèles dernière génération d'un prompt peut découler une réflexion de plusieurs prompts</a:t>
+            </a:r>
+          </a:p>
+          <a:p>
+            <a:pPr lvl="1"/>
+            <a:r>
+              <a:rPr lang="fr-FR" dirty="0"/>
+              <a:t>Un prompt de recherche par étape peut générer 4 à 5 prompts internes</a:t>
+            </a:r>
+          </a:p>
+          <a:p>
+            <a:pPr lvl="1"/>
+            <a:endParaRPr lang="fr-FR" dirty="0"/>
+          </a:p>
+          <a:p>
+            <a:pPr lvl="1"/>
+            <a:endParaRPr lang="fr-FR" dirty="0"/>
+          </a:p>
+        </p:txBody>
+      </p:sp>
+    </p:spTree>
+    <p:extLst>
+      <p:ext uri="{BB962C8B-B14F-4D97-AF65-F5344CB8AC3E}">
+        <p14:creationId xmlns:p14="http://schemas.microsoft.com/office/powerpoint/2010/main" val="3419210520"/>
+      </p:ext>
+    </p:extLst>
+  </p:cSld>
+  <p:clrMapOvr>
+    <a:masterClrMapping/>
+  </p:clrMapOvr>
+</p:sld>
+</file>
+
+<file path=ppt/slides/slide33.xml><?xml version="1.0" encoding="utf-8"?>
+<p:sld xmlns:a="http://schemas.openxmlformats.org/drawingml/2006/main" xmlns:r="http://schemas.openxmlformats.org/officeDocument/2006/relationships" xmlns:p="http://schemas.openxmlformats.org/presentationml/2006/main">
+  <p:cSld>
+    <p:spTree>
+      <p:nvGrpSpPr>
+        <p:cNvPr id="1" name=""/>
+        <p:cNvGrpSpPr/>
+        <p:nvPr/>
+      </p:nvGrpSpPr>
+      <p:grpSpPr>
+        <a:xfrm>
+          <a:off x="0" y="0"/>
+          <a:ext cx="0" cy="0"/>
+          <a:chOff x="0" y="0"/>
+          <a:chExt cx="0" cy="0"/>
+        </a:xfrm>
+      </p:grpSpPr>
+      <p:sp>
+        <p:nvSpPr>
+          <p:cNvPr id="2" name="Titre 1">
+            <a:extLst>
+              <a:ext uri="{FF2B5EF4-FFF2-40B4-BE49-F238E27FC236}">
+                <a16:creationId xmlns:a16="http://schemas.microsoft.com/office/drawing/2014/main" id="{F3C0106A-8416-38FE-4295-2A6C68D3258E}"/>
+              </a:ext>
+            </a:extLst>
+          </p:cNvPr>
+          <p:cNvSpPr>
+            <a:spLocks noGrp="1"/>
+          </p:cNvSpPr>
+          <p:nvPr>
+            <p:ph type="title"/>
+          </p:nvPr>
+        </p:nvSpPr>
+        <p:spPr>
+          <a:xfrm>
+            <a:off x="1187624" y="13209"/>
+            <a:ext cx="7829947" cy="1143000"/>
+          </a:xfrm>
+        </p:spPr>
+        <p:txBody>
+          <a:bodyPr wrap="square" anchor="ctr">
+            <a:normAutofit/>
+          </a:bodyPr>
+          <a:lstStyle/>
+          <a:p>
+            <a:r>
+              <a:rPr lang="fr-FR" dirty="0"/>
+              <a:t>SaaS privatif</a:t>
+            </a:r>
+          </a:p>
+        </p:txBody>
+      </p:sp>
+      <p:graphicFrame>
+        <p:nvGraphicFramePr>
+          <p:cNvPr id="5" name="Espace réservé du contenu 2">
+            <a:extLst>
+              <a:ext uri="{FF2B5EF4-FFF2-40B4-BE49-F238E27FC236}">
+                <a16:creationId xmlns:a16="http://schemas.microsoft.com/office/drawing/2014/main" id="{B1441F28-6E3C-D32E-CAA2-D6B3112FB787}"/>
+              </a:ext>
+            </a:extLst>
+          </p:cNvPr>
+          <p:cNvGraphicFramePr>
+            <a:graphicFrameLocks noGrp="1"/>
+          </p:cNvGraphicFramePr>
+          <p:nvPr>
+            <p:ph idx="1"/>
+            <p:extLst>
+              <p:ext uri="{D42A27DB-BD31-4B8C-83A1-F6EECF244321}">
+                <p14:modId xmlns:p14="http://schemas.microsoft.com/office/powerpoint/2010/main" val="2320854838"/>
+              </p:ext>
+            </p:extLst>
+          </p:nvPr>
+        </p:nvGraphicFramePr>
+        <p:xfrm>
+          <a:off x="179512" y="1412776"/>
+          <a:ext cx="8766051" cy="5040560"/>
+        </p:xfrm>
+        <a:graphic>
+          <a:graphicData uri="http://schemas.openxmlformats.org/drawingml/2006/diagram">
+            <dgm:relIds xmlns:dgm="http://schemas.openxmlformats.org/drawingml/2006/diagram" xmlns:r="http://schemas.openxmlformats.org/officeDocument/2006/relationships" r:dm="rId2" r:lo="rId3" r:qs="rId4" r:cs="rId5"/>
+          </a:graphicData>
+        </a:graphic>
+      </p:graphicFrame>
+    </p:spTree>
+    <p:extLst>
+      <p:ext uri="{BB962C8B-B14F-4D97-AF65-F5344CB8AC3E}">
+        <p14:creationId xmlns:p14="http://schemas.microsoft.com/office/powerpoint/2010/main" val="3138155791"/>
       </p:ext>
     </p:extLst>
   </p:cSld>
